--- a/RAC/20장/20장_진단성능종합운영.pptx
+++ b/RAC/20장/20장_진단성능종합운영.pptx
@@ -4,56 +4,59 @@
   <p:sldMasterIdLst>
     <p:sldMasterId id="2147483648" r:id="rId1"/>
   </p:sldMasterIdLst>
+  <p:notesMasterIdLst>
+    <p:notesMasterId r:id="rId49"/>
+  </p:notesMasterIdLst>
   <p:sldIdLst>
-    <p:sldId id="256" r:id="rId7"/>
-    <p:sldId id="257" r:id="rId8"/>
-    <p:sldId id="258" r:id="rId9"/>
-    <p:sldId id="259" r:id="rId10"/>
-    <p:sldId id="260" r:id="rId12"/>
-    <p:sldId id="261" r:id="rId13"/>
-    <p:sldId id="262" r:id="rId14"/>
-    <p:sldId id="263" r:id="rId15"/>
-    <p:sldId id="264" r:id="rId16"/>
-    <p:sldId id="265" r:id="rId17"/>
-    <p:sldId id="266" r:id="rId18"/>
-    <p:sldId id="267" r:id="rId19"/>
-    <p:sldId id="268" r:id="rId20"/>
-    <p:sldId id="269" r:id="rId21"/>
-    <p:sldId id="270" r:id="rId22"/>
-    <p:sldId id="271" r:id="rId23"/>
-    <p:sldId id="272" r:id="rId24"/>
-    <p:sldId id="273" r:id="rId25"/>
-    <p:sldId id="274" r:id="rId26"/>
-    <p:sldId id="275" r:id="rId27"/>
-    <p:sldId id="276" r:id="rId28"/>
-    <p:sldId id="277" r:id="rId29"/>
-    <p:sldId id="278" r:id="rId30"/>
-    <p:sldId id="279" r:id="rId31"/>
-    <p:sldId id="280" r:id="rId32"/>
-    <p:sldId id="281" r:id="rId33"/>
-    <p:sldId id="282" r:id="rId34"/>
-    <p:sldId id="283" r:id="rId35"/>
-    <p:sldId id="284" r:id="rId36"/>
-    <p:sldId id="285" r:id="rId37"/>
-    <p:sldId id="286" r:id="rId38"/>
-    <p:sldId id="287" r:id="rId39"/>
-    <p:sldId id="288" r:id="rId40"/>
-    <p:sldId id="289" r:id="rId41"/>
-    <p:sldId id="290" r:id="rId42"/>
-    <p:sldId id="291" r:id="rId43"/>
-    <p:sldId id="292" r:id="rId44"/>
-    <p:sldId id="293" r:id="rId45"/>
-    <p:sldId id="294" r:id="rId46"/>
-    <p:sldId id="295" r:id="rId47"/>
-    <p:sldId id="296" r:id="rId48"/>
-    <p:sldId id="297" r:id="rId49"/>
-    <p:sldId id="298" r:id="rId50"/>
-    <p:sldId id="299" r:id="rId51"/>
-    <p:sldId id="300" r:id="rId52"/>
-    <p:sldId id="301" r:id="rId53"/>
-    <p:sldId id="302" r:id="rId54"/>
+    <p:sldId id="256" r:id="rId2"/>
+    <p:sldId id="257" r:id="rId3"/>
+    <p:sldId id="258" r:id="rId4"/>
+    <p:sldId id="259" r:id="rId5"/>
+    <p:sldId id="260" r:id="rId6"/>
+    <p:sldId id="261" r:id="rId7"/>
+    <p:sldId id="262" r:id="rId8"/>
+    <p:sldId id="263" r:id="rId9"/>
+    <p:sldId id="264" r:id="rId10"/>
+    <p:sldId id="265" r:id="rId11"/>
+    <p:sldId id="266" r:id="rId12"/>
+    <p:sldId id="267" r:id="rId13"/>
+    <p:sldId id="268" r:id="rId14"/>
+    <p:sldId id="269" r:id="rId15"/>
+    <p:sldId id="270" r:id="rId16"/>
+    <p:sldId id="271" r:id="rId17"/>
+    <p:sldId id="272" r:id="rId18"/>
+    <p:sldId id="273" r:id="rId19"/>
+    <p:sldId id="274" r:id="rId20"/>
+    <p:sldId id="275" r:id="rId21"/>
+    <p:sldId id="276" r:id="rId22"/>
+    <p:sldId id="277" r:id="rId23"/>
+    <p:sldId id="278" r:id="rId24"/>
+    <p:sldId id="279" r:id="rId25"/>
+    <p:sldId id="280" r:id="rId26"/>
+    <p:sldId id="281" r:id="rId27"/>
+    <p:sldId id="282" r:id="rId28"/>
+    <p:sldId id="283" r:id="rId29"/>
+    <p:sldId id="284" r:id="rId30"/>
+    <p:sldId id="285" r:id="rId31"/>
+    <p:sldId id="286" r:id="rId32"/>
+    <p:sldId id="287" r:id="rId33"/>
+    <p:sldId id="288" r:id="rId34"/>
+    <p:sldId id="289" r:id="rId35"/>
+    <p:sldId id="290" r:id="rId36"/>
+    <p:sldId id="291" r:id="rId37"/>
+    <p:sldId id="292" r:id="rId38"/>
+    <p:sldId id="293" r:id="rId39"/>
+    <p:sldId id="294" r:id="rId40"/>
+    <p:sldId id="295" r:id="rId41"/>
+    <p:sldId id="296" r:id="rId42"/>
+    <p:sldId id="297" r:id="rId43"/>
+    <p:sldId id="298" r:id="rId44"/>
+    <p:sldId id="299" r:id="rId45"/>
+    <p:sldId id="300" r:id="rId46"/>
+    <p:sldId id="301" r:id="rId47"/>
+    <p:sldId id="302" r:id="rId48"/>
   </p:sldIdLst>
-  <p:sldSz cx="12191695" cy="6858000" type="screen4x3"/>
+  <p:sldSz cx="12192000" cy="6858000"/>
   <p:notesSz cx="6858000" cy="9144000"/>
   <p:defaultTextStyle>
     <a:defPPr>
@@ -150,11 +153,27 @@
       </a:defRPr>
     </a:lvl9pPr>
   </p:defaultTextStyle>
+  <p:extLst>
+    <p:ext uri="{EFAFB233-063F-42B5-8137-9DF3F51BA10A}">
+      <p15:sldGuideLst xmlns:p15="http://schemas.microsoft.com/office/powerpoint/2012/main">
+        <p15:guide id="1" orient="horz" pos="2160">
+          <p15:clr>
+            <a:srgbClr val="A4A3A4"/>
+          </p15:clr>
+        </p15:guide>
+        <p15:guide id="2" pos="2880">
+          <p15:clr>
+            <a:srgbClr val="A4A3A4"/>
+          </p15:clr>
+        </p15:guide>
+      </p15:sldGuideLst>
+    </p:ext>
+  </p:extLst>
 </p:presentation>
 </file>
 
 <file path=ppt/notesMasters/notesMaster1.xml><?xml version="1.0" encoding="utf-8"?>
-<p:notesMaster xmlns:a="http://schemas.openxmlformats.org/drawingml/2006/main" xmlns:p="http://schemas.openxmlformats.org/presentationml/2006/main" xmlns:r="http://schemas.openxmlformats.org/officeDocument/2006/relationships">
+<p:notesMaster xmlns:a="http://schemas.openxmlformats.org/drawingml/2006/main" xmlns:r="http://schemas.openxmlformats.org/officeDocument/2006/relationships" xmlns:p="http://schemas.openxmlformats.org/presentationml/2006/main">
   <p:cSld>
     <p:bg>
       <p:bgRef idx="1001">
@@ -177,7 +196,7 @@
       </p:grpSpPr>
       <p:sp>
         <p:nvSpPr>
-          <p:cNvPr id="2" name="Header Placeholder 1"/>
+          <p:cNvPr id="2" name="머리글 개체 틀 1"/>
           <p:cNvSpPr>
             <a:spLocks noGrp="1"/>
           </p:cNvSpPr>
@@ -188,7 +207,7 @@
         <p:spPr>
           <a:xfrm>
             <a:off x="0" y="0"/>
-            <a:ext cx="2971800" cy="457200"/>
+            <a:ext cx="2971800" cy="458788"/>
           </a:xfrm>
           <a:prstGeom prst="rect">
             <a:avLst/>
@@ -202,13 +221,13 @@
             </a:lvl1pPr>
           </a:lstStyle>
           <a:p>
-            <a:endParaRPr lang="en-US"/>
-          </a:p>
-        </p:txBody>
-      </p:sp>
-      <p:sp>
-        <p:nvSpPr>
-          <p:cNvPr id="3" name="Date Placeholder 2"/>
+            <a:endParaRPr lang="ko-KR" altLang="en-US"/>
+          </a:p>
+        </p:txBody>
+      </p:sp>
+      <p:sp>
+        <p:nvSpPr>
+          <p:cNvPr id="3" name="날짜 개체 틀 2"/>
           <p:cNvSpPr>
             <a:spLocks noGrp="1"/>
           </p:cNvSpPr>
@@ -219,7 +238,7 @@
         <p:spPr>
           <a:xfrm>
             <a:off x="3884613" y="0"/>
-            <a:ext cx="2971800" cy="457200"/>
+            <a:ext cx="2971800" cy="458788"/>
           </a:xfrm>
           <a:prstGeom prst="rect">
             <a:avLst/>
@@ -233,17 +252,17 @@
             </a:lvl1pPr>
           </a:lstStyle>
           <a:p>
-            <a:fld id="{0F89C1C7-3DCD-1040-A9CF-14679D8B5DDD}" type="datetimeFigureOut">
-              <a:rPr lang="en-US" smtClean="0"/>
-              <a:t>10/17/16</a:t>
+            <a:fld id="{DA2AC2C6-E088-4299-9E64-1F2085CE9D6C}" type="datetimeFigureOut">
+              <a:rPr lang="ko-KR" altLang="en-US" smtClean="0"/>
+              <a:t>2026-10-29</a:t>
             </a:fld>
-            <a:endParaRPr lang="en-US"/>
-          </a:p>
-        </p:txBody>
-      </p:sp>
-      <p:sp>
-        <p:nvSpPr>
-          <p:cNvPr id="4" name="Slide Image Placeholder 3"/>
+            <a:endParaRPr lang="ko-KR" altLang="en-US"/>
+          </a:p>
+        </p:txBody>
+      </p:sp>
+      <p:sp>
+        <p:nvSpPr>
+          <p:cNvPr id="4" name="슬라이드 이미지 개체 틀 3"/>
           <p:cNvSpPr>
             <a:spLocks noGrp="1" noRot="1" noChangeAspect="1"/>
           </p:cNvSpPr>
@@ -253,8 +272,8 @@
         </p:nvSpPr>
         <p:spPr>
           <a:xfrm>
-            <a:off x="1143000" y="685800"/>
-            <a:ext cx="4572000" cy="3429000"/>
+            <a:off x="685800" y="1143000"/>
+            <a:ext cx="5486400" cy="3086100"/>
           </a:xfrm>
           <a:prstGeom prst="rect">
             <a:avLst/>
@@ -270,13 +289,13 @@
           <a:bodyPr vert="horz" lIns="91440" tIns="45720" rIns="91440" bIns="45720" rtlCol="0" anchor="ctr"/>
           <a:lstStyle/>
           <a:p>
-            <a:endParaRPr lang="en-US"/>
-          </a:p>
-        </p:txBody>
-      </p:sp>
-      <p:sp>
-        <p:nvSpPr>
-          <p:cNvPr id="5" name="Notes Placeholder 4"/>
+            <a:endParaRPr lang="ko-KR" altLang="en-US"/>
+          </a:p>
+        </p:txBody>
+      </p:sp>
+      <p:sp>
+        <p:nvSpPr>
+          <p:cNvPr id="5" name="슬라이드 노트 개체 틀 4"/>
           <p:cNvSpPr>
             <a:spLocks noGrp="1"/>
           </p:cNvSpPr>
@@ -286,8 +305,8 @@
         </p:nvSpPr>
         <p:spPr>
           <a:xfrm>
-            <a:off x="685800" y="4343400"/>
-            <a:ext cx="5486400" cy="4114800"/>
+            <a:off x="685800" y="4400550"/>
+            <a:ext cx="5486400" cy="3600450"/>
           </a:xfrm>
           <a:prstGeom prst="rect">
             <a:avLst/>
@@ -299,44 +318,43 @@
           <a:p>
             <a:pPr lvl="0"/>
             <a:r>
-              <a:rPr lang="en-US" smtClean="0"/>
-              <a:t>Click to edit Master text styles</a:t>
+              <a:rPr lang="ko-KR" altLang="en-US"/>
+              <a:t>마스터 텍스트 스타일을 편집하려면 클릭</a:t>
             </a:r>
           </a:p>
           <a:p>
             <a:pPr lvl="1"/>
             <a:r>
-              <a:rPr lang="en-US" smtClean="0"/>
-              <a:t>Second level</a:t>
+              <a:rPr lang="ko-KR" altLang="en-US"/>
+              <a:t>두 번째 수준</a:t>
             </a:r>
           </a:p>
           <a:p>
             <a:pPr lvl="2"/>
             <a:r>
-              <a:rPr lang="en-US" smtClean="0"/>
-              <a:t>Third level</a:t>
+              <a:rPr lang="ko-KR" altLang="en-US"/>
+              <a:t>세 번째 수준</a:t>
             </a:r>
           </a:p>
           <a:p>
             <a:pPr lvl="3"/>
             <a:r>
-              <a:rPr lang="en-US" smtClean="0"/>
-              <a:t>Fourth level</a:t>
+              <a:rPr lang="ko-KR" altLang="en-US"/>
+              <a:t>네 번째 수준</a:t>
             </a:r>
           </a:p>
           <a:p>
             <a:pPr lvl="4"/>
             <a:r>
-              <a:rPr lang="en-US" smtClean="0"/>
-              <a:t>Fifth level</a:t>
-            </a:r>
-            <a:endParaRPr lang="en-US"/>
-          </a:p>
-        </p:txBody>
-      </p:sp>
-      <p:sp>
-        <p:nvSpPr>
-          <p:cNvPr id="6" name="Footer Placeholder 5"/>
+              <a:rPr lang="ko-KR" altLang="en-US"/>
+              <a:t>다섯 번째 수준</a:t>
+            </a:r>
+          </a:p>
+        </p:txBody>
+      </p:sp>
+      <p:sp>
+        <p:nvSpPr>
+          <p:cNvPr id="6" name="바닥글 개체 틀 5"/>
           <p:cNvSpPr>
             <a:spLocks noGrp="1"/>
           </p:cNvSpPr>
@@ -347,7 +365,7 @@
         <p:spPr>
           <a:xfrm>
             <a:off x="0" y="8685213"/>
-            <a:ext cx="2971800" cy="457200"/>
+            <a:ext cx="2971800" cy="458787"/>
           </a:xfrm>
           <a:prstGeom prst="rect">
             <a:avLst/>
@@ -361,13 +379,13 @@
             </a:lvl1pPr>
           </a:lstStyle>
           <a:p>
-            <a:endParaRPr lang="en-US"/>
-          </a:p>
-        </p:txBody>
-      </p:sp>
-      <p:sp>
-        <p:nvSpPr>
-          <p:cNvPr id="7" name="Slide Number Placeholder 6"/>
+            <a:endParaRPr lang="ko-KR" altLang="en-US"/>
+          </a:p>
+        </p:txBody>
+      </p:sp>
+      <p:sp>
+        <p:nvSpPr>
+          <p:cNvPr id="7" name="슬라이드 번호 개체 틀 6"/>
           <p:cNvSpPr>
             <a:spLocks noGrp="1"/>
           </p:cNvSpPr>
@@ -378,7 +396,7 @@
         <p:spPr>
           <a:xfrm>
             <a:off x="3884613" y="8685213"/>
-            <a:ext cx="2971800" cy="457200"/>
+            <a:ext cx="2971800" cy="458787"/>
           </a:xfrm>
           <a:prstGeom prst="rect">
             <a:avLst/>
@@ -392,24 +410,24 @@
             </a:lvl1pPr>
           </a:lstStyle>
           <a:p>
-            <a:fld id="{BB5E49A5-4136-284D-997B-48E1D791AD67}" type="slidenum">
-              <a:rPr lang="en-US" smtClean="0"/>
+            <a:fld id="{F8047A84-D0EB-4590-A01F-7E4590FCA639}" type="slidenum">
+              <a:rPr lang="ko-KR" altLang="en-US" smtClean="0"/>
               <a:t>‹#›</a:t>
             </a:fld>
-            <a:endParaRPr lang="en-US"/>
+            <a:endParaRPr lang="ko-KR" altLang="en-US"/>
           </a:p>
         </p:txBody>
       </p:sp>
     </p:spTree>
     <p:extLst>
       <p:ext uri="{BB962C8B-B14F-4D97-AF65-F5344CB8AC3E}">
-        <p14:creationId xmlns:p14="http://schemas.microsoft.com/office/powerpoint/2010/main" val="2623252185"/>
+        <p14:creationId xmlns:p14="http://schemas.microsoft.com/office/powerpoint/2010/main" val="2989045050"/>
       </p:ext>
     </p:extLst>
   </p:cSld>
   <p:clrMap bg1="lt1" tx1="dk1" bg2="lt2" tx2="dk2" accent1="accent1" accent2="accent2" accent3="accent3" accent4="accent4" accent5="accent5" accent6="accent6" hlink="hlink" folHlink="folHlink"/>
   <p:notesStyle>
-    <a:lvl1pPr marL="0" algn="l" defTabSz="457200" rtl="0" eaLnBrk="1" latinLnBrk="0" hangingPunct="1">
+    <a:lvl1pPr marL="0" algn="l" defTabSz="914400" rtl="0" eaLnBrk="1" latinLnBrk="1" hangingPunct="1">
       <a:defRPr sz="1200" kern="1200">
         <a:solidFill>
           <a:schemeClr val="tx1"/>
@@ -419,7 +437,7 @@
         <a:cs typeface="+mn-cs"/>
       </a:defRPr>
     </a:lvl1pPr>
-    <a:lvl2pPr marL="457200" algn="l" defTabSz="457200" rtl="0" eaLnBrk="1" latinLnBrk="0" hangingPunct="1">
+    <a:lvl2pPr marL="457200" algn="l" defTabSz="914400" rtl="0" eaLnBrk="1" latinLnBrk="1" hangingPunct="1">
       <a:defRPr sz="1200" kern="1200">
         <a:solidFill>
           <a:schemeClr val="tx1"/>
@@ -429,7 +447,7 @@
         <a:cs typeface="+mn-cs"/>
       </a:defRPr>
     </a:lvl2pPr>
-    <a:lvl3pPr marL="914400" algn="l" defTabSz="457200" rtl="0" eaLnBrk="1" latinLnBrk="0" hangingPunct="1">
+    <a:lvl3pPr marL="914400" algn="l" defTabSz="914400" rtl="0" eaLnBrk="1" latinLnBrk="1" hangingPunct="1">
       <a:defRPr sz="1200" kern="1200">
         <a:solidFill>
           <a:schemeClr val="tx1"/>
@@ -439,7 +457,7 @@
         <a:cs typeface="+mn-cs"/>
       </a:defRPr>
     </a:lvl3pPr>
-    <a:lvl4pPr marL="1371600" algn="l" defTabSz="457200" rtl="0" eaLnBrk="1" latinLnBrk="0" hangingPunct="1">
+    <a:lvl4pPr marL="1371600" algn="l" defTabSz="914400" rtl="0" eaLnBrk="1" latinLnBrk="1" hangingPunct="1">
       <a:defRPr sz="1200" kern="1200">
         <a:solidFill>
           <a:schemeClr val="tx1"/>
@@ -449,7 +467,7 @@
         <a:cs typeface="+mn-cs"/>
       </a:defRPr>
     </a:lvl4pPr>
-    <a:lvl5pPr marL="1828800" algn="l" defTabSz="457200" rtl="0" eaLnBrk="1" latinLnBrk="0" hangingPunct="1">
+    <a:lvl5pPr marL="1828800" algn="l" defTabSz="914400" rtl="0" eaLnBrk="1" latinLnBrk="1" hangingPunct="1">
       <a:defRPr sz="1200" kern="1200">
         <a:solidFill>
           <a:schemeClr val="tx1"/>
@@ -459,7 +477,7 @@
         <a:cs typeface="+mn-cs"/>
       </a:defRPr>
     </a:lvl5pPr>
-    <a:lvl6pPr marL="2286000" algn="l" defTabSz="457200" rtl="0" eaLnBrk="1" latinLnBrk="0" hangingPunct="1">
+    <a:lvl6pPr marL="2286000" algn="l" defTabSz="914400" rtl="0" eaLnBrk="1" latinLnBrk="1" hangingPunct="1">
       <a:defRPr sz="1200" kern="1200">
         <a:solidFill>
           <a:schemeClr val="tx1"/>
@@ -469,7 +487,7 @@
         <a:cs typeface="+mn-cs"/>
       </a:defRPr>
     </a:lvl6pPr>
-    <a:lvl7pPr marL="2743200" algn="l" defTabSz="457200" rtl="0" eaLnBrk="1" latinLnBrk="0" hangingPunct="1">
+    <a:lvl7pPr marL="2743200" algn="l" defTabSz="914400" rtl="0" eaLnBrk="1" latinLnBrk="1" hangingPunct="1">
       <a:defRPr sz="1200" kern="1200">
         <a:solidFill>
           <a:schemeClr val="tx1"/>
@@ -479,7 +497,7 @@
         <a:cs typeface="+mn-cs"/>
       </a:defRPr>
     </a:lvl7pPr>
-    <a:lvl8pPr marL="3200400" algn="l" defTabSz="457200" rtl="0" eaLnBrk="1" latinLnBrk="0" hangingPunct="1">
+    <a:lvl8pPr marL="3200400" algn="l" defTabSz="914400" rtl="0" eaLnBrk="1" latinLnBrk="1" hangingPunct="1">
       <a:defRPr sz="1200" kern="1200">
         <a:solidFill>
           <a:schemeClr val="tx1"/>
@@ -489,7 +507,7 @@
         <a:cs typeface="+mn-cs"/>
       </a:defRPr>
     </a:lvl8pPr>
-    <a:lvl9pPr marL="3657600" algn="l" defTabSz="457200" rtl="0" eaLnBrk="1" latinLnBrk="0" hangingPunct="1">
+    <a:lvl9pPr marL="3657600" algn="l" defTabSz="914400" rtl="0" eaLnBrk="1" latinLnBrk="1" hangingPunct="1">
       <a:defRPr sz="1200" kern="1200">
         <a:solidFill>
           <a:schemeClr val="tx1"/>
@@ -504,7 +522,7 @@
 </file>
 
 <file path=ppt/notesSlides/notesSlide1.xml><?xml version="1.0" encoding="utf-8"?>
-<p:notes xmlns:a="http://schemas.openxmlformats.org/drawingml/2006/main" xmlns:p="http://schemas.openxmlformats.org/presentationml/2006/main" xmlns:r="http://schemas.openxmlformats.org/officeDocument/2006/relationships">
+<p:notes xmlns:a="http://schemas.openxmlformats.org/drawingml/2006/main" xmlns:r="http://schemas.openxmlformats.org/officeDocument/2006/relationships" xmlns:p="http://schemas.openxmlformats.org/presentationml/2006/main">
   <p:cSld>
     <p:spTree>
       <p:nvGrpSpPr>
@@ -524,7 +542,7 @@
         <p:nvSpPr>
           <p:cNvPr id="2" name="Slide Image Placeholder 1"/>
           <p:cNvSpPr>
-            <a:spLocks noGrp="1"/>
+            <a:spLocks noGrp="1" noRot="1" noChangeAspect="1"/>
           </p:cNvSpPr>
           <p:nvPr>
             <p:ph type="sldImg" idx="2"/>
@@ -539,7 +557,7 @@
             <a:spLocks noGrp="1"/>
           </p:cNvSpPr>
           <p:nvPr>
-            <p:ph type="body" idx="3" sz="quarter"/>
+            <p:ph type="body" sz="quarter" idx="3"/>
           </p:nvPr>
         </p:nvSpPr>
         <p:spPr/>
@@ -560,7 +578,7 @@
             <a:spLocks noGrp="1"/>
           </p:cNvSpPr>
           <p:nvPr>
-            <p:ph type="sldNum" idx="5" sz="quarter"/>
+            <p:ph type="sldNum" sz="quarter" idx="5"/>
           </p:nvPr>
         </p:nvSpPr>
         <p:spPr/>
@@ -574,7 +592,7 @@
 </file>
 
 <file path=ppt/notesSlides/notesSlide10.xml><?xml version="1.0" encoding="utf-8"?>
-<p:notes xmlns:a="http://schemas.openxmlformats.org/drawingml/2006/main" xmlns:p="http://schemas.openxmlformats.org/presentationml/2006/main" xmlns:r="http://schemas.openxmlformats.org/officeDocument/2006/relationships">
+<p:notes xmlns:a="http://schemas.openxmlformats.org/drawingml/2006/main" xmlns:r="http://schemas.openxmlformats.org/officeDocument/2006/relationships" xmlns:p="http://schemas.openxmlformats.org/presentationml/2006/main">
   <p:cSld>
     <p:spTree>
       <p:nvGrpSpPr>
@@ -594,7 +612,7 @@
         <p:nvSpPr>
           <p:cNvPr id="2" name="Slide Image Placeholder 1"/>
           <p:cNvSpPr>
-            <a:spLocks noGrp="1"/>
+            <a:spLocks noGrp="1" noRot="1" noChangeAspect="1"/>
           </p:cNvSpPr>
           <p:nvPr>
             <p:ph type="sldImg" idx="2"/>
@@ -609,7 +627,7 @@
             <a:spLocks noGrp="1"/>
           </p:cNvSpPr>
           <p:nvPr>
-            <p:ph type="body" idx="3" sz="quarter"/>
+            <p:ph type="body" sz="quarter" idx="3"/>
           </p:nvPr>
         </p:nvSpPr>
         <p:spPr/>
@@ -630,7 +648,7 @@
             <a:spLocks noGrp="1"/>
           </p:cNvSpPr>
           <p:nvPr>
-            <p:ph type="sldNum" idx="5" sz="quarter"/>
+            <p:ph type="sldNum" sz="quarter" idx="5"/>
           </p:nvPr>
         </p:nvSpPr>
         <p:spPr/>
@@ -644,7 +662,7 @@
 </file>
 
 <file path=ppt/notesSlides/notesSlide11.xml><?xml version="1.0" encoding="utf-8"?>
-<p:notes xmlns:a="http://schemas.openxmlformats.org/drawingml/2006/main" xmlns:p="http://schemas.openxmlformats.org/presentationml/2006/main" xmlns:r="http://schemas.openxmlformats.org/officeDocument/2006/relationships">
+<p:notes xmlns:a="http://schemas.openxmlformats.org/drawingml/2006/main" xmlns:r="http://schemas.openxmlformats.org/officeDocument/2006/relationships" xmlns:p="http://schemas.openxmlformats.org/presentationml/2006/main">
   <p:cSld>
     <p:spTree>
       <p:nvGrpSpPr>
@@ -664,7 +682,7 @@
         <p:nvSpPr>
           <p:cNvPr id="2" name="Slide Image Placeholder 1"/>
           <p:cNvSpPr>
-            <a:spLocks noGrp="1"/>
+            <a:spLocks noGrp="1" noRot="1" noChangeAspect="1"/>
           </p:cNvSpPr>
           <p:nvPr>
             <p:ph type="sldImg" idx="2"/>
@@ -679,7 +697,7 @@
             <a:spLocks noGrp="1"/>
           </p:cNvSpPr>
           <p:nvPr>
-            <p:ph type="body" idx="3" sz="quarter"/>
+            <p:ph type="body" sz="quarter" idx="3"/>
           </p:nvPr>
         </p:nvSpPr>
         <p:spPr/>
@@ -700,7 +718,7 @@
             <a:spLocks noGrp="1"/>
           </p:cNvSpPr>
           <p:nvPr>
-            <p:ph type="sldNum" idx="5" sz="quarter"/>
+            <p:ph type="sldNum" sz="quarter" idx="5"/>
           </p:nvPr>
         </p:nvSpPr>
         <p:spPr/>
@@ -714,7 +732,7 @@
 </file>
 
 <file path=ppt/notesSlides/notesSlide12.xml><?xml version="1.0" encoding="utf-8"?>
-<p:notes xmlns:a="http://schemas.openxmlformats.org/drawingml/2006/main" xmlns:p="http://schemas.openxmlformats.org/presentationml/2006/main" xmlns:r="http://schemas.openxmlformats.org/officeDocument/2006/relationships">
+<p:notes xmlns:a="http://schemas.openxmlformats.org/drawingml/2006/main" xmlns:r="http://schemas.openxmlformats.org/officeDocument/2006/relationships" xmlns:p="http://schemas.openxmlformats.org/presentationml/2006/main">
   <p:cSld>
     <p:spTree>
       <p:nvGrpSpPr>
@@ -734,7 +752,7 @@
         <p:nvSpPr>
           <p:cNvPr id="2" name="Slide Image Placeholder 1"/>
           <p:cNvSpPr>
-            <a:spLocks noGrp="1"/>
+            <a:spLocks noGrp="1" noRot="1" noChangeAspect="1"/>
           </p:cNvSpPr>
           <p:nvPr>
             <p:ph type="sldImg" idx="2"/>
@@ -749,7 +767,7 @@
             <a:spLocks noGrp="1"/>
           </p:cNvSpPr>
           <p:nvPr>
-            <p:ph type="body" idx="3" sz="quarter"/>
+            <p:ph type="body" sz="quarter" idx="3"/>
           </p:nvPr>
         </p:nvSpPr>
         <p:spPr/>
@@ -770,7 +788,7 @@
             <a:spLocks noGrp="1"/>
           </p:cNvSpPr>
           <p:nvPr>
-            <p:ph type="sldNum" idx="5" sz="quarter"/>
+            <p:ph type="sldNum" sz="quarter" idx="5"/>
           </p:nvPr>
         </p:nvSpPr>
         <p:spPr/>
@@ -784,7 +802,7 @@
 </file>
 
 <file path=ppt/notesSlides/notesSlide13.xml><?xml version="1.0" encoding="utf-8"?>
-<p:notes xmlns:a="http://schemas.openxmlformats.org/drawingml/2006/main" xmlns:p="http://schemas.openxmlformats.org/presentationml/2006/main" xmlns:r="http://schemas.openxmlformats.org/officeDocument/2006/relationships">
+<p:notes xmlns:a="http://schemas.openxmlformats.org/drawingml/2006/main" xmlns:r="http://schemas.openxmlformats.org/officeDocument/2006/relationships" xmlns:p="http://schemas.openxmlformats.org/presentationml/2006/main">
   <p:cSld>
     <p:spTree>
       <p:nvGrpSpPr>
@@ -804,7 +822,7 @@
         <p:nvSpPr>
           <p:cNvPr id="2" name="Slide Image Placeholder 1"/>
           <p:cNvSpPr>
-            <a:spLocks noGrp="1"/>
+            <a:spLocks noGrp="1" noRot="1" noChangeAspect="1"/>
           </p:cNvSpPr>
           <p:nvPr>
             <p:ph type="sldImg" idx="2"/>
@@ -819,7 +837,7 @@
             <a:spLocks noGrp="1"/>
           </p:cNvSpPr>
           <p:nvPr>
-            <p:ph type="body" idx="3" sz="quarter"/>
+            <p:ph type="body" sz="quarter" idx="3"/>
           </p:nvPr>
         </p:nvSpPr>
         <p:spPr/>
@@ -840,7 +858,7 @@
             <a:spLocks noGrp="1"/>
           </p:cNvSpPr>
           <p:nvPr>
-            <p:ph type="sldNum" idx="5" sz="quarter"/>
+            <p:ph type="sldNum" sz="quarter" idx="5"/>
           </p:nvPr>
         </p:nvSpPr>
         <p:spPr/>
@@ -854,7 +872,7 @@
 </file>
 
 <file path=ppt/notesSlides/notesSlide14.xml><?xml version="1.0" encoding="utf-8"?>
-<p:notes xmlns:a="http://schemas.openxmlformats.org/drawingml/2006/main" xmlns:p="http://schemas.openxmlformats.org/presentationml/2006/main" xmlns:r="http://schemas.openxmlformats.org/officeDocument/2006/relationships">
+<p:notes xmlns:a="http://schemas.openxmlformats.org/drawingml/2006/main" xmlns:r="http://schemas.openxmlformats.org/officeDocument/2006/relationships" xmlns:p="http://schemas.openxmlformats.org/presentationml/2006/main">
   <p:cSld>
     <p:spTree>
       <p:nvGrpSpPr>
@@ -874,7 +892,7 @@
         <p:nvSpPr>
           <p:cNvPr id="2" name="Slide Image Placeholder 1"/>
           <p:cNvSpPr>
-            <a:spLocks noGrp="1"/>
+            <a:spLocks noGrp="1" noRot="1" noChangeAspect="1"/>
           </p:cNvSpPr>
           <p:nvPr>
             <p:ph type="sldImg" idx="2"/>
@@ -889,7 +907,7 @@
             <a:spLocks noGrp="1"/>
           </p:cNvSpPr>
           <p:nvPr>
-            <p:ph type="body" idx="3" sz="quarter"/>
+            <p:ph type="body" sz="quarter" idx="3"/>
           </p:nvPr>
         </p:nvSpPr>
         <p:spPr/>
@@ -910,7 +928,7 @@
             <a:spLocks noGrp="1"/>
           </p:cNvSpPr>
           <p:nvPr>
-            <p:ph type="sldNum" idx="5" sz="quarter"/>
+            <p:ph type="sldNum" sz="quarter" idx="5"/>
           </p:nvPr>
         </p:nvSpPr>
         <p:spPr/>
@@ -924,7 +942,7 @@
 </file>
 
 <file path=ppt/notesSlides/notesSlide15.xml><?xml version="1.0" encoding="utf-8"?>
-<p:notes xmlns:a="http://schemas.openxmlformats.org/drawingml/2006/main" xmlns:p="http://schemas.openxmlformats.org/presentationml/2006/main" xmlns:r="http://schemas.openxmlformats.org/officeDocument/2006/relationships">
+<p:notes xmlns:a="http://schemas.openxmlformats.org/drawingml/2006/main" xmlns:r="http://schemas.openxmlformats.org/officeDocument/2006/relationships" xmlns:p="http://schemas.openxmlformats.org/presentationml/2006/main">
   <p:cSld>
     <p:spTree>
       <p:nvGrpSpPr>
@@ -944,7 +962,7 @@
         <p:nvSpPr>
           <p:cNvPr id="2" name="Slide Image Placeholder 1"/>
           <p:cNvSpPr>
-            <a:spLocks noGrp="1"/>
+            <a:spLocks noGrp="1" noRot="1" noChangeAspect="1"/>
           </p:cNvSpPr>
           <p:nvPr>
             <p:ph type="sldImg" idx="2"/>
@@ -959,7 +977,7 @@
             <a:spLocks noGrp="1"/>
           </p:cNvSpPr>
           <p:nvPr>
-            <p:ph type="body" idx="3" sz="quarter"/>
+            <p:ph type="body" sz="quarter" idx="3"/>
           </p:nvPr>
         </p:nvSpPr>
         <p:spPr/>
@@ -980,7 +998,7 @@
             <a:spLocks noGrp="1"/>
           </p:cNvSpPr>
           <p:nvPr>
-            <p:ph type="sldNum" idx="5" sz="quarter"/>
+            <p:ph type="sldNum" sz="quarter" idx="5"/>
           </p:nvPr>
         </p:nvSpPr>
         <p:spPr/>
@@ -994,7 +1012,7 @@
 </file>
 
 <file path=ppt/notesSlides/notesSlide16.xml><?xml version="1.0" encoding="utf-8"?>
-<p:notes xmlns:a="http://schemas.openxmlformats.org/drawingml/2006/main" xmlns:p="http://schemas.openxmlformats.org/presentationml/2006/main" xmlns:r="http://schemas.openxmlformats.org/officeDocument/2006/relationships">
+<p:notes xmlns:a="http://schemas.openxmlformats.org/drawingml/2006/main" xmlns:r="http://schemas.openxmlformats.org/officeDocument/2006/relationships" xmlns:p="http://schemas.openxmlformats.org/presentationml/2006/main">
   <p:cSld>
     <p:spTree>
       <p:nvGrpSpPr>
@@ -1014,7 +1032,7 @@
         <p:nvSpPr>
           <p:cNvPr id="2" name="Slide Image Placeholder 1"/>
           <p:cNvSpPr>
-            <a:spLocks noGrp="1"/>
+            <a:spLocks noGrp="1" noRot="1" noChangeAspect="1"/>
           </p:cNvSpPr>
           <p:nvPr>
             <p:ph type="sldImg" idx="2"/>
@@ -1029,7 +1047,7 @@
             <a:spLocks noGrp="1"/>
           </p:cNvSpPr>
           <p:nvPr>
-            <p:ph type="body" idx="3" sz="quarter"/>
+            <p:ph type="body" sz="quarter" idx="3"/>
           </p:nvPr>
         </p:nvSpPr>
         <p:spPr/>
@@ -1050,7 +1068,7 @@
             <a:spLocks noGrp="1"/>
           </p:cNvSpPr>
           <p:nvPr>
-            <p:ph type="sldNum" idx="5" sz="quarter"/>
+            <p:ph type="sldNum" sz="quarter" idx="5"/>
           </p:nvPr>
         </p:nvSpPr>
         <p:spPr/>
@@ -1064,7 +1082,7 @@
 </file>
 
 <file path=ppt/notesSlides/notesSlide17.xml><?xml version="1.0" encoding="utf-8"?>
-<p:notes xmlns:a="http://schemas.openxmlformats.org/drawingml/2006/main" xmlns:p="http://schemas.openxmlformats.org/presentationml/2006/main" xmlns:r="http://schemas.openxmlformats.org/officeDocument/2006/relationships">
+<p:notes xmlns:a="http://schemas.openxmlformats.org/drawingml/2006/main" xmlns:r="http://schemas.openxmlformats.org/officeDocument/2006/relationships" xmlns:p="http://schemas.openxmlformats.org/presentationml/2006/main">
   <p:cSld>
     <p:spTree>
       <p:nvGrpSpPr>
@@ -1084,7 +1102,7 @@
         <p:nvSpPr>
           <p:cNvPr id="2" name="Slide Image Placeholder 1"/>
           <p:cNvSpPr>
-            <a:spLocks noGrp="1"/>
+            <a:spLocks noGrp="1" noRot="1" noChangeAspect="1"/>
           </p:cNvSpPr>
           <p:nvPr>
             <p:ph type="sldImg" idx="2"/>
@@ -1099,7 +1117,7 @@
             <a:spLocks noGrp="1"/>
           </p:cNvSpPr>
           <p:nvPr>
-            <p:ph type="body" idx="3" sz="quarter"/>
+            <p:ph type="body" sz="quarter" idx="3"/>
           </p:nvPr>
         </p:nvSpPr>
         <p:spPr/>
@@ -1120,7 +1138,7 @@
             <a:spLocks noGrp="1"/>
           </p:cNvSpPr>
           <p:nvPr>
-            <p:ph type="sldNum" idx="5" sz="quarter"/>
+            <p:ph type="sldNum" sz="quarter" idx="5"/>
           </p:nvPr>
         </p:nvSpPr>
         <p:spPr/>
@@ -1134,7 +1152,7 @@
 </file>
 
 <file path=ppt/notesSlides/notesSlide18.xml><?xml version="1.0" encoding="utf-8"?>
-<p:notes xmlns:a="http://schemas.openxmlformats.org/drawingml/2006/main" xmlns:p="http://schemas.openxmlformats.org/presentationml/2006/main" xmlns:r="http://schemas.openxmlformats.org/officeDocument/2006/relationships">
+<p:notes xmlns:a="http://schemas.openxmlformats.org/drawingml/2006/main" xmlns:r="http://schemas.openxmlformats.org/officeDocument/2006/relationships" xmlns:p="http://schemas.openxmlformats.org/presentationml/2006/main">
   <p:cSld>
     <p:spTree>
       <p:nvGrpSpPr>
@@ -1154,7 +1172,7 @@
         <p:nvSpPr>
           <p:cNvPr id="2" name="Slide Image Placeholder 1"/>
           <p:cNvSpPr>
-            <a:spLocks noGrp="1"/>
+            <a:spLocks noGrp="1" noRot="1" noChangeAspect="1"/>
           </p:cNvSpPr>
           <p:nvPr>
             <p:ph type="sldImg" idx="2"/>
@@ -1169,7 +1187,7 @@
             <a:spLocks noGrp="1"/>
           </p:cNvSpPr>
           <p:nvPr>
-            <p:ph type="body" idx="3" sz="quarter"/>
+            <p:ph type="body" sz="quarter" idx="3"/>
           </p:nvPr>
         </p:nvSpPr>
         <p:spPr/>
@@ -1190,7 +1208,7 @@
             <a:spLocks noGrp="1"/>
           </p:cNvSpPr>
           <p:nvPr>
-            <p:ph type="sldNum" idx="5" sz="quarter"/>
+            <p:ph type="sldNum" sz="quarter" idx="5"/>
           </p:nvPr>
         </p:nvSpPr>
         <p:spPr/>
@@ -1204,7 +1222,7 @@
 </file>
 
 <file path=ppt/notesSlides/notesSlide19.xml><?xml version="1.0" encoding="utf-8"?>
-<p:notes xmlns:a="http://schemas.openxmlformats.org/drawingml/2006/main" xmlns:p="http://schemas.openxmlformats.org/presentationml/2006/main" xmlns:r="http://schemas.openxmlformats.org/officeDocument/2006/relationships">
+<p:notes xmlns:a="http://schemas.openxmlformats.org/drawingml/2006/main" xmlns:r="http://schemas.openxmlformats.org/officeDocument/2006/relationships" xmlns:p="http://schemas.openxmlformats.org/presentationml/2006/main">
   <p:cSld>
     <p:spTree>
       <p:nvGrpSpPr>
@@ -1224,7 +1242,7 @@
         <p:nvSpPr>
           <p:cNvPr id="2" name="Slide Image Placeholder 1"/>
           <p:cNvSpPr>
-            <a:spLocks noGrp="1"/>
+            <a:spLocks noGrp="1" noRot="1" noChangeAspect="1"/>
           </p:cNvSpPr>
           <p:nvPr>
             <p:ph type="sldImg" idx="2"/>
@@ -1239,7 +1257,7 @@
             <a:spLocks noGrp="1"/>
           </p:cNvSpPr>
           <p:nvPr>
-            <p:ph type="body" idx="3" sz="quarter"/>
+            <p:ph type="body" sz="quarter" idx="3"/>
           </p:nvPr>
         </p:nvSpPr>
         <p:spPr/>
@@ -1260,7 +1278,7 @@
             <a:spLocks noGrp="1"/>
           </p:cNvSpPr>
           <p:nvPr>
-            <p:ph type="sldNum" idx="5" sz="quarter"/>
+            <p:ph type="sldNum" sz="quarter" idx="5"/>
           </p:nvPr>
         </p:nvSpPr>
         <p:spPr/>
@@ -1274,7 +1292,7 @@
 </file>
 
 <file path=ppt/notesSlides/notesSlide2.xml><?xml version="1.0" encoding="utf-8"?>
-<p:notes xmlns:a="http://schemas.openxmlformats.org/drawingml/2006/main" xmlns:p="http://schemas.openxmlformats.org/presentationml/2006/main" xmlns:r="http://schemas.openxmlformats.org/officeDocument/2006/relationships">
+<p:notes xmlns:a="http://schemas.openxmlformats.org/drawingml/2006/main" xmlns:r="http://schemas.openxmlformats.org/officeDocument/2006/relationships" xmlns:p="http://schemas.openxmlformats.org/presentationml/2006/main">
   <p:cSld>
     <p:spTree>
       <p:nvGrpSpPr>
@@ -1294,7 +1312,7 @@
         <p:nvSpPr>
           <p:cNvPr id="2" name="Slide Image Placeholder 1"/>
           <p:cNvSpPr>
-            <a:spLocks noGrp="1"/>
+            <a:spLocks noGrp="1" noRot="1" noChangeAspect="1"/>
           </p:cNvSpPr>
           <p:nvPr>
             <p:ph type="sldImg" idx="2"/>
@@ -1309,7 +1327,7 @@
             <a:spLocks noGrp="1"/>
           </p:cNvSpPr>
           <p:nvPr>
-            <p:ph type="body" idx="3" sz="quarter"/>
+            <p:ph type="body" sz="quarter" idx="3"/>
           </p:nvPr>
         </p:nvSpPr>
         <p:spPr/>
@@ -1330,7 +1348,7 @@
             <a:spLocks noGrp="1"/>
           </p:cNvSpPr>
           <p:nvPr>
-            <p:ph type="sldNum" idx="5" sz="quarter"/>
+            <p:ph type="sldNum" sz="quarter" idx="5"/>
           </p:nvPr>
         </p:nvSpPr>
         <p:spPr/>
@@ -1344,7 +1362,7 @@
 </file>
 
 <file path=ppt/notesSlides/notesSlide20.xml><?xml version="1.0" encoding="utf-8"?>
-<p:notes xmlns:a="http://schemas.openxmlformats.org/drawingml/2006/main" xmlns:p="http://schemas.openxmlformats.org/presentationml/2006/main" xmlns:r="http://schemas.openxmlformats.org/officeDocument/2006/relationships">
+<p:notes xmlns:a="http://schemas.openxmlformats.org/drawingml/2006/main" xmlns:r="http://schemas.openxmlformats.org/officeDocument/2006/relationships" xmlns:p="http://schemas.openxmlformats.org/presentationml/2006/main">
   <p:cSld>
     <p:spTree>
       <p:nvGrpSpPr>
@@ -1364,7 +1382,7 @@
         <p:nvSpPr>
           <p:cNvPr id="2" name="Slide Image Placeholder 1"/>
           <p:cNvSpPr>
-            <a:spLocks noGrp="1"/>
+            <a:spLocks noGrp="1" noRot="1" noChangeAspect="1"/>
           </p:cNvSpPr>
           <p:nvPr>
             <p:ph type="sldImg" idx="2"/>
@@ -1379,7 +1397,7 @@
             <a:spLocks noGrp="1"/>
           </p:cNvSpPr>
           <p:nvPr>
-            <p:ph type="body" idx="3" sz="quarter"/>
+            <p:ph type="body" sz="quarter" idx="3"/>
           </p:nvPr>
         </p:nvSpPr>
         <p:spPr/>
@@ -1400,7 +1418,7 @@
             <a:spLocks noGrp="1"/>
           </p:cNvSpPr>
           <p:nvPr>
-            <p:ph type="sldNum" idx="5" sz="quarter"/>
+            <p:ph type="sldNum" sz="quarter" idx="5"/>
           </p:nvPr>
         </p:nvSpPr>
         <p:spPr/>
@@ -1414,7 +1432,7 @@
 </file>
 
 <file path=ppt/notesSlides/notesSlide21.xml><?xml version="1.0" encoding="utf-8"?>
-<p:notes xmlns:a="http://schemas.openxmlformats.org/drawingml/2006/main" xmlns:p="http://schemas.openxmlformats.org/presentationml/2006/main" xmlns:r="http://schemas.openxmlformats.org/officeDocument/2006/relationships">
+<p:notes xmlns:a="http://schemas.openxmlformats.org/drawingml/2006/main" xmlns:r="http://schemas.openxmlformats.org/officeDocument/2006/relationships" xmlns:p="http://schemas.openxmlformats.org/presentationml/2006/main">
   <p:cSld>
     <p:spTree>
       <p:nvGrpSpPr>
@@ -1434,7 +1452,7 @@
         <p:nvSpPr>
           <p:cNvPr id="2" name="Slide Image Placeholder 1"/>
           <p:cNvSpPr>
-            <a:spLocks noGrp="1"/>
+            <a:spLocks noGrp="1" noRot="1" noChangeAspect="1"/>
           </p:cNvSpPr>
           <p:nvPr>
             <p:ph type="sldImg" idx="2"/>
@@ -1449,7 +1467,7 @@
             <a:spLocks noGrp="1"/>
           </p:cNvSpPr>
           <p:nvPr>
-            <p:ph type="body" idx="3" sz="quarter"/>
+            <p:ph type="body" sz="quarter" idx="3"/>
           </p:nvPr>
         </p:nvSpPr>
         <p:spPr/>
@@ -1470,7 +1488,7 @@
             <a:spLocks noGrp="1"/>
           </p:cNvSpPr>
           <p:nvPr>
-            <p:ph type="sldNum" idx="5" sz="quarter"/>
+            <p:ph type="sldNum" sz="quarter" idx="5"/>
           </p:nvPr>
         </p:nvSpPr>
         <p:spPr/>
@@ -1484,7 +1502,7 @@
 </file>
 
 <file path=ppt/notesSlides/notesSlide22.xml><?xml version="1.0" encoding="utf-8"?>
-<p:notes xmlns:a="http://schemas.openxmlformats.org/drawingml/2006/main" xmlns:p="http://schemas.openxmlformats.org/presentationml/2006/main" xmlns:r="http://schemas.openxmlformats.org/officeDocument/2006/relationships">
+<p:notes xmlns:a="http://schemas.openxmlformats.org/drawingml/2006/main" xmlns:r="http://schemas.openxmlformats.org/officeDocument/2006/relationships" xmlns:p="http://schemas.openxmlformats.org/presentationml/2006/main">
   <p:cSld>
     <p:spTree>
       <p:nvGrpSpPr>
@@ -1504,7 +1522,7 @@
         <p:nvSpPr>
           <p:cNvPr id="2" name="Slide Image Placeholder 1"/>
           <p:cNvSpPr>
-            <a:spLocks noGrp="1"/>
+            <a:spLocks noGrp="1" noRot="1" noChangeAspect="1"/>
           </p:cNvSpPr>
           <p:nvPr>
             <p:ph type="sldImg" idx="2"/>
@@ -1519,7 +1537,7 @@
             <a:spLocks noGrp="1"/>
           </p:cNvSpPr>
           <p:nvPr>
-            <p:ph type="body" idx="3" sz="quarter"/>
+            <p:ph type="body" sz="quarter" idx="3"/>
           </p:nvPr>
         </p:nvSpPr>
         <p:spPr/>
@@ -1540,7 +1558,7 @@
             <a:spLocks noGrp="1"/>
           </p:cNvSpPr>
           <p:nvPr>
-            <p:ph type="sldNum" idx="5" sz="quarter"/>
+            <p:ph type="sldNum" sz="quarter" idx="5"/>
           </p:nvPr>
         </p:nvSpPr>
         <p:spPr/>
@@ -1554,7 +1572,7 @@
 </file>
 
 <file path=ppt/notesSlides/notesSlide23.xml><?xml version="1.0" encoding="utf-8"?>
-<p:notes xmlns:a="http://schemas.openxmlformats.org/drawingml/2006/main" xmlns:p="http://schemas.openxmlformats.org/presentationml/2006/main" xmlns:r="http://schemas.openxmlformats.org/officeDocument/2006/relationships">
+<p:notes xmlns:a="http://schemas.openxmlformats.org/drawingml/2006/main" xmlns:r="http://schemas.openxmlformats.org/officeDocument/2006/relationships" xmlns:p="http://schemas.openxmlformats.org/presentationml/2006/main">
   <p:cSld>
     <p:spTree>
       <p:nvGrpSpPr>
@@ -1574,7 +1592,7 @@
         <p:nvSpPr>
           <p:cNvPr id="2" name="Slide Image Placeholder 1"/>
           <p:cNvSpPr>
-            <a:spLocks noGrp="1"/>
+            <a:spLocks noGrp="1" noRot="1" noChangeAspect="1"/>
           </p:cNvSpPr>
           <p:nvPr>
             <p:ph type="sldImg" idx="2"/>
@@ -1589,7 +1607,7 @@
             <a:spLocks noGrp="1"/>
           </p:cNvSpPr>
           <p:nvPr>
-            <p:ph type="body" idx="3" sz="quarter"/>
+            <p:ph type="body" sz="quarter" idx="3"/>
           </p:nvPr>
         </p:nvSpPr>
         <p:spPr/>
@@ -1610,7 +1628,7 @@
             <a:spLocks noGrp="1"/>
           </p:cNvSpPr>
           <p:nvPr>
-            <p:ph type="sldNum" idx="5" sz="quarter"/>
+            <p:ph type="sldNum" sz="quarter" idx="5"/>
           </p:nvPr>
         </p:nvSpPr>
         <p:spPr/>
@@ -1624,7 +1642,7 @@
 </file>
 
 <file path=ppt/notesSlides/notesSlide24.xml><?xml version="1.0" encoding="utf-8"?>
-<p:notes xmlns:a="http://schemas.openxmlformats.org/drawingml/2006/main" xmlns:p="http://schemas.openxmlformats.org/presentationml/2006/main" xmlns:r="http://schemas.openxmlformats.org/officeDocument/2006/relationships">
+<p:notes xmlns:a="http://schemas.openxmlformats.org/drawingml/2006/main" xmlns:r="http://schemas.openxmlformats.org/officeDocument/2006/relationships" xmlns:p="http://schemas.openxmlformats.org/presentationml/2006/main">
   <p:cSld>
     <p:spTree>
       <p:nvGrpSpPr>
@@ -1644,7 +1662,7 @@
         <p:nvSpPr>
           <p:cNvPr id="2" name="Slide Image Placeholder 1"/>
           <p:cNvSpPr>
-            <a:spLocks noGrp="1"/>
+            <a:spLocks noGrp="1" noRot="1" noChangeAspect="1"/>
           </p:cNvSpPr>
           <p:nvPr>
             <p:ph type="sldImg" idx="2"/>
@@ -1659,7 +1677,7 @@
             <a:spLocks noGrp="1"/>
           </p:cNvSpPr>
           <p:nvPr>
-            <p:ph type="body" idx="3" sz="quarter"/>
+            <p:ph type="body" sz="quarter" idx="3"/>
           </p:nvPr>
         </p:nvSpPr>
         <p:spPr/>
@@ -1680,7 +1698,7 @@
             <a:spLocks noGrp="1"/>
           </p:cNvSpPr>
           <p:nvPr>
-            <p:ph type="sldNum" idx="5" sz="quarter"/>
+            <p:ph type="sldNum" sz="quarter" idx="5"/>
           </p:nvPr>
         </p:nvSpPr>
         <p:spPr/>
@@ -1694,7 +1712,7 @@
 </file>
 
 <file path=ppt/notesSlides/notesSlide25.xml><?xml version="1.0" encoding="utf-8"?>
-<p:notes xmlns:a="http://schemas.openxmlformats.org/drawingml/2006/main" xmlns:p="http://schemas.openxmlformats.org/presentationml/2006/main" xmlns:r="http://schemas.openxmlformats.org/officeDocument/2006/relationships">
+<p:notes xmlns:a="http://schemas.openxmlformats.org/drawingml/2006/main" xmlns:r="http://schemas.openxmlformats.org/officeDocument/2006/relationships" xmlns:p="http://schemas.openxmlformats.org/presentationml/2006/main">
   <p:cSld>
     <p:spTree>
       <p:nvGrpSpPr>
@@ -1714,7 +1732,7 @@
         <p:nvSpPr>
           <p:cNvPr id="2" name="Slide Image Placeholder 1"/>
           <p:cNvSpPr>
-            <a:spLocks noGrp="1"/>
+            <a:spLocks noGrp="1" noRot="1" noChangeAspect="1"/>
           </p:cNvSpPr>
           <p:nvPr>
             <p:ph type="sldImg" idx="2"/>
@@ -1729,7 +1747,7 @@
             <a:spLocks noGrp="1"/>
           </p:cNvSpPr>
           <p:nvPr>
-            <p:ph type="body" idx="3" sz="quarter"/>
+            <p:ph type="body" sz="quarter" idx="3"/>
           </p:nvPr>
         </p:nvSpPr>
         <p:spPr/>
@@ -1750,7 +1768,7 @@
             <a:spLocks noGrp="1"/>
           </p:cNvSpPr>
           <p:nvPr>
-            <p:ph type="sldNum" idx="5" sz="quarter"/>
+            <p:ph type="sldNum" sz="quarter" idx="5"/>
           </p:nvPr>
         </p:nvSpPr>
         <p:spPr/>
@@ -1764,7 +1782,7 @@
 </file>
 
 <file path=ppt/notesSlides/notesSlide26.xml><?xml version="1.0" encoding="utf-8"?>
-<p:notes xmlns:a="http://schemas.openxmlformats.org/drawingml/2006/main" xmlns:p="http://schemas.openxmlformats.org/presentationml/2006/main" xmlns:r="http://schemas.openxmlformats.org/officeDocument/2006/relationships">
+<p:notes xmlns:a="http://schemas.openxmlformats.org/drawingml/2006/main" xmlns:r="http://schemas.openxmlformats.org/officeDocument/2006/relationships" xmlns:p="http://schemas.openxmlformats.org/presentationml/2006/main">
   <p:cSld>
     <p:spTree>
       <p:nvGrpSpPr>
@@ -1784,7 +1802,7 @@
         <p:nvSpPr>
           <p:cNvPr id="2" name="Slide Image Placeholder 1"/>
           <p:cNvSpPr>
-            <a:spLocks noGrp="1"/>
+            <a:spLocks noGrp="1" noRot="1" noChangeAspect="1"/>
           </p:cNvSpPr>
           <p:nvPr>
             <p:ph type="sldImg" idx="2"/>
@@ -1799,7 +1817,7 @@
             <a:spLocks noGrp="1"/>
           </p:cNvSpPr>
           <p:nvPr>
-            <p:ph type="body" idx="3" sz="quarter"/>
+            <p:ph type="body" sz="quarter" idx="3"/>
           </p:nvPr>
         </p:nvSpPr>
         <p:spPr/>
@@ -1820,7 +1838,7 @@
             <a:spLocks noGrp="1"/>
           </p:cNvSpPr>
           <p:nvPr>
-            <p:ph type="sldNum" idx="5" sz="quarter"/>
+            <p:ph type="sldNum" sz="quarter" idx="5"/>
           </p:nvPr>
         </p:nvSpPr>
         <p:spPr/>
@@ -1834,7 +1852,7 @@
 </file>
 
 <file path=ppt/notesSlides/notesSlide27.xml><?xml version="1.0" encoding="utf-8"?>
-<p:notes xmlns:a="http://schemas.openxmlformats.org/drawingml/2006/main" xmlns:p="http://schemas.openxmlformats.org/presentationml/2006/main" xmlns:r="http://schemas.openxmlformats.org/officeDocument/2006/relationships">
+<p:notes xmlns:a="http://schemas.openxmlformats.org/drawingml/2006/main" xmlns:r="http://schemas.openxmlformats.org/officeDocument/2006/relationships" xmlns:p="http://schemas.openxmlformats.org/presentationml/2006/main">
   <p:cSld>
     <p:spTree>
       <p:nvGrpSpPr>
@@ -1854,7 +1872,7 @@
         <p:nvSpPr>
           <p:cNvPr id="2" name="Slide Image Placeholder 1"/>
           <p:cNvSpPr>
-            <a:spLocks noGrp="1"/>
+            <a:spLocks noGrp="1" noRot="1" noChangeAspect="1"/>
           </p:cNvSpPr>
           <p:nvPr>
             <p:ph type="sldImg" idx="2"/>
@@ -1869,7 +1887,7 @@
             <a:spLocks noGrp="1"/>
           </p:cNvSpPr>
           <p:nvPr>
-            <p:ph type="body" idx="3" sz="quarter"/>
+            <p:ph type="body" sz="quarter" idx="3"/>
           </p:nvPr>
         </p:nvSpPr>
         <p:spPr/>
@@ -1890,7 +1908,7 @@
             <a:spLocks noGrp="1"/>
           </p:cNvSpPr>
           <p:nvPr>
-            <p:ph type="sldNum" idx="5" sz="quarter"/>
+            <p:ph type="sldNum" sz="quarter" idx="5"/>
           </p:nvPr>
         </p:nvSpPr>
         <p:spPr/>
@@ -1904,7 +1922,7 @@
 </file>
 
 <file path=ppt/notesSlides/notesSlide28.xml><?xml version="1.0" encoding="utf-8"?>
-<p:notes xmlns:a="http://schemas.openxmlformats.org/drawingml/2006/main" xmlns:p="http://schemas.openxmlformats.org/presentationml/2006/main" xmlns:r="http://schemas.openxmlformats.org/officeDocument/2006/relationships">
+<p:notes xmlns:a="http://schemas.openxmlformats.org/drawingml/2006/main" xmlns:r="http://schemas.openxmlformats.org/officeDocument/2006/relationships" xmlns:p="http://schemas.openxmlformats.org/presentationml/2006/main">
   <p:cSld>
     <p:spTree>
       <p:nvGrpSpPr>
@@ -1924,7 +1942,7 @@
         <p:nvSpPr>
           <p:cNvPr id="2" name="Slide Image Placeholder 1"/>
           <p:cNvSpPr>
-            <a:spLocks noGrp="1"/>
+            <a:spLocks noGrp="1" noRot="1" noChangeAspect="1"/>
           </p:cNvSpPr>
           <p:nvPr>
             <p:ph type="sldImg" idx="2"/>
@@ -1939,7 +1957,7 @@
             <a:spLocks noGrp="1"/>
           </p:cNvSpPr>
           <p:nvPr>
-            <p:ph type="body" idx="3" sz="quarter"/>
+            <p:ph type="body" sz="quarter" idx="3"/>
           </p:nvPr>
         </p:nvSpPr>
         <p:spPr/>
@@ -1960,7 +1978,7 @@
             <a:spLocks noGrp="1"/>
           </p:cNvSpPr>
           <p:nvPr>
-            <p:ph type="sldNum" idx="5" sz="quarter"/>
+            <p:ph type="sldNum" sz="quarter" idx="5"/>
           </p:nvPr>
         </p:nvSpPr>
         <p:spPr/>
@@ -1974,7 +1992,7 @@
 </file>
 
 <file path=ppt/notesSlides/notesSlide29.xml><?xml version="1.0" encoding="utf-8"?>
-<p:notes xmlns:a="http://schemas.openxmlformats.org/drawingml/2006/main" xmlns:p="http://schemas.openxmlformats.org/presentationml/2006/main" xmlns:r="http://schemas.openxmlformats.org/officeDocument/2006/relationships">
+<p:notes xmlns:a="http://schemas.openxmlformats.org/drawingml/2006/main" xmlns:r="http://schemas.openxmlformats.org/officeDocument/2006/relationships" xmlns:p="http://schemas.openxmlformats.org/presentationml/2006/main">
   <p:cSld>
     <p:spTree>
       <p:nvGrpSpPr>
@@ -1994,7 +2012,7 @@
         <p:nvSpPr>
           <p:cNvPr id="2" name="Slide Image Placeholder 1"/>
           <p:cNvSpPr>
-            <a:spLocks noGrp="1"/>
+            <a:spLocks noGrp="1" noRot="1" noChangeAspect="1"/>
           </p:cNvSpPr>
           <p:nvPr>
             <p:ph type="sldImg" idx="2"/>
@@ -2009,7 +2027,7 @@
             <a:spLocks noGrp="1"/>
           </p:cNvSpPr>
           <p:nvPr>
-            <p:ph type="body" idx="3" sz="quarter"/>
+            <p:ph type="body" sz="quarter" idx="3"/>
           </p:nvPr>
         </p:nvSpPr>
         <p:spPr/>
@@ -2030,7 +2048,7 @@
             <a:spLocks noGrp="1"/>
           </p:cNvSpPr>
           <p:nvPr>
-            <p:ph type="sldNum" idx="5" sz="quarter"/>
+            <p:ph type="sldNum" sz="quarter" idx="5"/>
           </p:nvPr>
         </p:nvSpPr>
         <p:spPr/>
@@ -2044,7 +2062,7 @@
 </file>
 
 <file path=ppt/notesSlides/notesSlide3.xml><?xml version="1.0" encoding="utf-8"?>
-<p:notes xmlns:a="http://schemas.openxmlformats.org/drawingml/2006/main" xmlns:p="http://schemas.openxmlformats.org/presentationml/2006/main" xmlns:r="http://schemas.openxmlformats.org/officeDocument/2006/relationships">
+<p:notes xmlns:a="http://schemas.openxmlformats.org/drawingml/2006/main" xmlns:r="http://schemas.openxmlformats.org/officeDocument/2006/relationships" xmlns:p="http://schemas.openxmlformats.org/presentationml/2006/main">
   <p:cSld>
     <p:spTree>
       <p:nvGrpSpPr>
@@ -2064,7 +2082,7 @@
         <p:nvSpPr>
           <p:cNvPr id="2" name="Slide Image Placeholder 1"/>
           <p:cNvSpPr>
-            <a:spLocks noGrp="1"/>
+            <a:spLocks noGrp="1" noRot="1" noChangeAspect="1"/>
           </p:cNvSpPr>
           <p:nvPr>
             <p:ph type="sldImg" idx="2"/>
@@ -2079,7 +2097,7 @@
             <a:spLocks noGrp="1"/>
           </p:cNvSpPr>
           <p:nvPr>
-            <p:ph type="body" idx="3" sz="quarter"/>
+            <p:ph type="body" sz="quarter" idx="3"/>
           </p:nvPr>
         </p:nvSpPr>
         <p:spPr/>
@@ -2100,7 +2118,7 @@
             <a:spLocks noGrp="1"/>
           </p:cNvSpPr>
           <p:nvPr>
-            <p:ph type="sldNum" idx="5" sz="quarter"/>
+            <p:ph type="sldNum" sz="quarter" idx="5"/>
           </p:nvPr>
         </p:nvSpPr>
         <p:spPr/>
@@ -2114,7 +2132,7 @@
 </file>
 
 <file path=ppt/notesSlides/notesSlide30.xml><?xml version="1.0" encoding="utf-8"?>
-<p:notes xmlns:a="http://schemas.openxmlformats.org/drawingml/2006/main" xmlns:p="http://schemas.openxmlformats.org/presentationml/2006/main" xmlns:r="http://schemas.openxmlformats.org/officeDocument/2006/relationships">
+<p:notes xmlns:a="http://schemas.openxmlformats.org/drawingml/2006/main" xmlns:r="http://schemas.openxmlformats.org/officeDocument/2006/relationships" xmlns:p="http://schemas.openxmlformats.org/presentationml/2006/main">
   <p:cSld>
     <p:spTree>
       <p:nvGrpSpPr>
@@ -2134,7 +2152,7 @@
         <p:nvSpPr>
           <p:cNvPr id="2" name="Slide Image Placeholder 1"/>
           <p:cNvSpPr>
-            <a:spLocks noGrp="1"/>
+            <a:spLocks noGrp="1" noRot="1" noChangeAspect="1"/>
           </p:cNvSpPr>
           <p:nvPr>
             <p:ph type="sldImg" idx="2"/>
@@ -2149,7 +2167,7 @@
             <a:spLocks noGrp="1"/>
           </p:cNvSpPr>
           <p:nvPr>
-            <p:ph type="body" idx="3" sz="quarter"/>
+            <p:ph type="body" sz="quarter" idx="3"/>
           </p:nvPr>
         </p:nvSpPr>
         <p:spPr/>
@@ -2170,7 +2188,7 @@
             <a:spLocks noGrp="1"/>
           </p:cNvSpPr>
           <p:nvPr>
-            <p:ph type="sldNum" idx="5" sz="quarter"/>
+            <p:ph type="sldNum" sz="quarter" idx="5"/>
           </p:nvPr>
         </p:nvSpPr>
         <p:spPr/>
@@ -2184,7 +2202,7 @@
 </file>
 
 <file path=ppt/notesSlides/notesSlide31.xml><?xml version="1.0" encoding="utf-8"?>
-<p:notes xmlns:a="http://schemas.openxmlformats.org/drawingml/2006/main" xmlns:p="http://schemas.openxmlformats.org/presentationml/2006/main" xmlns:r="http://schemas.openxmlformats.org/officeDocument/2006/relationships">
+<p:notes xmlns:a="http://schemas.openxmlformats.org/drawingml/2006/main" xmlns:r="http://schemas.openxmlformats.org/officeDocument/2006/relationships" xmlns:p="http://schemas.openxmlformats.org/presentationml/2006/main">
   <p:cSld>
     <p:spTree>
       <p:nvGrpSpPr>
@@ -2204,7 +2222,7 @@
         <p:nvSpPr>
           <p:cNvPr id="2" name="Slide Image Placeholder 1"/>
           <p:cNvSpPr>
-            <a:spLocks noGrp="1"/>
+            <a:spLocks noGrp="1" noRot="1" noChangeAspect="1"/>
           </p:cNvSpPr>
           <p:nvPr>
             <p:ph type="sldImg" idx="2"/>
@@ -2219,7 +2237,7 @@
             <a:spLocks noGrp="1"/>
           </p:cNvSpPr>
           <p:nvPr>
-            <p:ph type="body" idx="3" sz="quarter"/>
+            <p:ph type="body" sz="quarter" idx="3"/>
           </p:nvPr>
         </p:nvSpPr>
         <p:spPr/>
@@ -2240,7 +2258,7 @@
             <a:spLocks noGrp="1"/>
           </p:cNvSpPr>
           <p:nvPr>
-            <p:ph type="sldNum" idx="5" sz="quarter"/>
+            <p:ph type="sldNum" sz="quarter" idx="5"/>
           </p:nvPr>
         </p:nvSpPr>
         <p:spPr/>
@@ -2254,7 +2272,7 @@
 </file>
 
 <file path=ppt/notesSlides/notesSlide32.xml><?xml version="1.0" encoding="utf-8"?>
-<p:notes xmlns:a="http://schemas.openxmlformats.org/drawingml/2006/main" xmlns:p="http://schemas.openxmlformats.org/presentationml/2006/main" xmlns:r="http://schemas.openxmlformats.org/officeDocument/2006/relationships">
+<p:notes xmlns:a="http://schemas.openxmlformats.org/drawingml/2006/main" xmlns:r="http://schemas.openxmlformats.org/officeDocument/2006/relationships" xmlns:p="http://schemas.openxmlformats.org/presentationml/2006/main">
   <p:cSld>
     <p:spTree>
       <p:nvGrpSpPr>
@@ -2274,7 +2292,7 @@
         <p:nvSpPr>
           <p:cNvPr id="2" name="Slide Image Placeholder 1"/>
           <p:cNvSpPr>
-            <a:spLocks noGrp="1"/>
+            <a:spLocks noGrp="1" noRot="1" noChangeAspect="1"/>
           </p:cNvSpPr>
           <p:nvPr>
             <p:ph type="sldImg" idx="2"/>
@@ -2289,7 +2307,7 @@
             <a:spLocks noGrp="1"/>
           </p:cNvSpPr>
           <p:nvPr>
-            <p:ph type="body" idx="3" sz="quarter"/>
+            <p:ph type="body" sz="quarter" idx="3"/>
           </p:nvPr>
         </p:nvSpPr>
         <p:spPr/>
@@ -2310,7 +2328,7 @@
             <a:spLocks noGrp="1"/>
           </p:cNvSpPr>
           <p:nvPr>
-            <p:ph type="sldNum" idx="5" sz="quarter"/>
+            <p:ph type="sldNum" sz="quarter" idx="5"/>
           </p:nvPr>
         </p:nvSpPr>
         <p:spPr/>
@@ -2324,7 +2342,7 @@
 </file>
 
 <file path=ppt/notesSlides/notesSlide33.xml><?xml version="1.0" encoding="utf-8"?>
-<p:notes xmlns:a="http://schemas.openxmlformats.org/drawingml/2006/main" xmlns:p="http://schemas.openxmlformats.org/presentationml/2006/main" xmlns:r="http://schemas.openxmlformats.org/officeDocument/2006/relationships">
+<p:notes xmlns:a="http://schemas.openxmlformats.org/drawingml/2006/main" xmlns:r="http://schemas.openxmlformats.org/officeDocument/2006/relationships" xmlns:p="http://schemas.openxmlformats.org/presentationml/2006/main">
   <p:cSld>
     <p:spTree>
       <p:nvGrpSpPr>
@@ -2344,7 +2362,7 @@
         <p:nvSpPr>
           <p:cNvPr id="2" name="Slide Image Placeholder 1"/>
           <p:cNvSpPr>
-            <a:spLocks noGrp="1"/>
+            <a:spLocks noGrp="1" noRot="1" noChangeAspect="1"/>
           </p:cNvSpPr>
           <p:nvPr>
             <p:ph type="sldImg" idx="2"/>
@@ -2359,7 +2377,7 @@
             <a:spLocks noGrp="1"/>
           </p:cNvSpPr>
           <p:nvPr>
-            <p:ph type="body" idx="3" sz="quarter"/>
+            <p:ph type="body" sz="quarter" idx="3"/>
           </p:nvPr>
         </p:nvSpPr>
         <p:spPr/>
@@ -2380,7 +2398,7 @@
             <a:spLocks noGrp="1"/>
           </p:cNvSpPr>
           <p:nvPr>
-            <p:ph type="sldNum" idx="5" sz="quarter"/>
+            <p:ph type="sldNum" sz="quarter" idx="5"/>
           </p:nvPr>
         </p:nvSpPr>
         <p:spPr/>
@@ -2394,7 +2412,7 @@
 </file>
 
 <file path=ppt/notesSlides/notesSlide34.xml><?xml version="1.0" encoding="utf-8"?>
-<p:notes xmlns:a="http://schemas.openxmlformats.org/drawingml/2006/main" xmlns:p="http://schemas.openxmlformats.org/presentationml/2006/main" xmlns:r="http://schemas.openxmlformats.org/officeDocument/2006/relationships">
+<p:notes xmlns:a="http://schemas.openxmlformats.org/drawingml/2006/main" xmlns:r="http://schemas.openxmlformats.org/officeDocument/2006/relationships" xmlns:p="http://schemas.openxmlformats.org/presentationml/2006/main">
   <p:cSld>
     <p:spTree>
       <p:nvGrpSpPr>
@@ -2414,7 +2432,7 @@
         <p:nvSpPr>
           <p:cNvPr id="2" name="Slide Image Placeholder 1"/>
           <p:cNvSpPr>
-            <a:spLocks noGrp="1"/>
+            <a:spLocks noGrp="1" noRot="1" noChangeAspect="1"/>
           </p:cNvSpPr>
           <p:nvPr>
             <p:ph type="sldImg" idx="2"/>
@@ -2429,7 +2447,7 @@
             <a:spLocks noGrp="1"/>
           </p:cNvSpPr>
           <p:nvPr>
-            <p:ph type="body" idx="3" sz="quarter"/>
+            <p:ph type="body" sz="quarter" idx="3"/>
           </p:nvPr>
         </p:nvSpPr>
         <p:spPr/>
@@ -2450,7 +2468,7 @@
             <a:spLocks noGrp="1"/>
           </p:cNvSpPr>
           <p:nvPr>
-            <p:ph type="sldNum" idx="5" sz="quarter"/>
+            <p:ph type="sldNum" sz="quarter" idx="5"/>
           </p:nvPr>
         </p:nvSpPr>
         <p:spPr/>
@@ -2464,7 +2482,7 @@
 </file>
 
 <file path=ppt/notesSlides/notesSlide35.xml><?xml version="1.0" encoding="utf-8"?>
-<p:notes xmlns:a="http://schemas.openxmlformats.org/drawingml/2006/main" xmlns:p="http://schemas.openxmlformats.org/presentationml/2006/main" xmlns:r="http://schemas.openxmlformats.org/officeDocument/2006/relationships">
+<p:notes xmlns:a="http://schemas.openxmlformats.org/drawingml/2006/main" xmlns:r="http://schemas.openxmlformats.org/officeDocument/2006/relationships" xmlns:p="http://schemas.openxmlformats.org/presentationml/2006/main">
   <p:cSld>
     <p:spTree>
       <p:nvGrpSpPr>
@@ -2484,7 +2502,7 @@
         <p:nvSpPr>
           <p:cNvPr id="2" name="Slide Image Placeholder 1"/>
           <p:cNvSpPr>
-            <a:spLocks noGrp="1"/>
+            <a:spLocks noGrp="1" noRot="1" noChangeAspect="1"/>
           </p:cNvSpPr>
           <p:nvPr>
             <p:ph type="sldImg" idx="2"/>
@@ -2499,7 +2517,7 @@
             <a:spLocks noGrp="1"/>
           </p:cNvSpPr>
           <p:nvPr>
-            <p:ph type="body" idx="3" sz="quarter"/>
+            <p:ph type="body" sz="quarter" idx="3"/>
           </p:nvPr>
         </p:nvSpPr>
         <p:spPr/>
@@ -2520,7 +2538,7 @@
             <a:spLocks noGrp="1"/>
           </p:cNvSpPr>
           <p:nvPr>
-            <p:ph type="sldNum" idx="5" sz="quarter"/>
+            <p:ph type="sldNum" sz="quarter" idx="5"/>
           </p:nvPr>
         </p:nvSpPr>
         <p:spPr/>
@@ -2534,7 +2552,7 @@
 </file>
 
 <file path=ppt/notesSlides/notesSlide36.xml><?xml version="1.0" encoding="utf-8"?>
-<p:notes xmlns:a="http://schemas.openxmlformats.org/drawingml/2006/main" xmlns:p="http://schemas.openxmlformats.org/presentationml/2006/main" xmlns:r="http://schemas.openxmlformats.org/officeDocument/2006/relationships">
+<p:notes xmlns:a="http://schemas.openxmlformats.org/drawingml/2006/main" xmlns:r="http://schemas.openxmlformats.org/officeDocument/2006/relationships" xmlns:p="http://schemas.openxmlformats.org/presentationml/2006/main">
   <p:cSld>
     <p:spTree>
       <p:nvGrpSpPr>
@@ -2554,7 +2572,7 @@
         <p:nvSpPr>
           <p:cNvPr id="2" name="Slide Image Placeholder 1"/>
           <p:cNvSpPr>
-            <a:spLocks noGrp="1"/>
+            <a:spLocks noGrp="1" noRot="1" noChangeAspect="1"/>
           </p:cNvSpPr>
           <p:nvPr>
             <p:ph type="sldImg" idx="2"/>
@@ -2569,7 +2587,7 @@
             <a:spLocks noGrp="1"/>
           </p:cNvSpPr>
           <p:nvPr>
-            <p:ph type="body" idx="3" sz="quarter"/>
+            <p:ph type="body" sz="quarter" idx="3"/>
           </p:nvPr>
         </p:nvSpPr>
         <p:spPr/>
@@ -2590,7 +2608,7 @@
             <a:spLocks noGrp="1"/>
           </p:cNvSpPr>
           <p:nvPr>
-            <p:ph type="sldNum" idx="5" sz="quarter"/>
+            <p:ph type="sldNum" sz="quarter" idx="5"/>
           </p:nvPr>
         </p:nvSpPr>
         <p:spPr/>
@@ -2604,7 +2622,7 @@
 </file>
 
 <file path=ppt/notesSlides/notesSlide37.xml><?xml version="1.0" encoding="utf-8"?>
-<p:notes xmlns:a="http://schemas.openxmlformats.org/drawingml/2006/main" xmlns:p="http://schemas.openxmlformats.org/presentationml/2006/main" xmlns:r="http://schemas.openxmlformats.org/officeDocument/2006/relationships">
+<p:notes xmlns:a="http://schemas.openxmlformats.org/drawingml/2006/main" xmlns:r="http://schemas.openxmlformats.org/officeDocument/2006/relationships" xmlns:p="http://schemas.openxmlformats.org/presentationml/2006/main">
   <p:cSld>
     <p:spTree>
       <p:nvGrpSpPr>
@@ -2624,7 +2642,7 @@
         <p:nvSpPr>
           <p:cNvPr id="2" name="Slide Image Placeholder 1"/>
           <p:cNvSpPr>
-            <a:spLocks noGrp="1"/>
+            <a:spLocks noGrp="1" noRot="1" noChangeAspect="1"/>
           </p:cNvSpPr>
           <p:nvPr>
             <p:ph type="sldImg" idx="2"/>
@@ -2639,7 +2657,7 @@
             <a:spLocks noGrp="1"/>
           </p:cNvSpPr>
           <p:nvPr>
-            <p:ph type="body" idx="3" sz="quarter"/>
+            <p:ph type="body" sz="quarter" idx="3"/>
           </p:nvPr>
         </p:nvSpPr>
         <p:spPr/>
@@ -2660,7 +2678,7 @@
             <a:spLocks noGrp="1"/>
           </p:cNvSpPr>
           <p:nvPr>
-            <p:ph type="sldNum" idx="5" sz="quarter"/>
+            <p:ph type="sldNum" sz="quarter" idx="5"/>
           </p:nvPr>
         </p:nvSpPr>
         <p:spPr/>
@@ -2674,7 +2692,7 @@
 </file>
 
 <file path=ppt/notesSlides/notesSlide4.xml><?xml version="1.0" encoding="utf-8"?>
-<p:notes xmlns:a="http://schemas.openxmlformats.org/drawingml/2006/main" xmlns:p="http://schemas.openxmlformats.org/presentationml/2006/main" xmlns:r="http://schemas.openxmlformats.org/officeDocument/2006/relationships">
+<p:notes xmlns:a="http://schemas.openxmlformats.org/drawingml/2006/main" xmlns:r="http://schemas.openxmlformats.org/officeDocument/2006/relationships" xmlns:p="http://schemas.openxmlformats.org/presentationml/2006/main">
   <p:cSld>
     <p:spTree>
       <p:nvGrpSpPr>
@@ -2694,7 +2712,7 @@
         <p:nvSpPr>
           <p:cNvPr id="2" name="Slide Image Placeholder 1"/>
           <p:cNvSpPr>
-            <a:spLocks noGrp="1"/>
+            <a:spLocks noGrp="1" noRot="1" noChangeAspect="1"/>
           </p:cNvSpPr>
           <p:nvPr>
             <p:ph type="sldImg" idx="2"/>
@@ -2709,7 +2727,7 @@
             <a:spLocks noGrp="1"/>
           </p:cNvSpPr>
           <p:nvPr>
-            <p:ph type="body" idx="3" sz="quarter"/>
+            <p:ph type="body" sz="quarter" idx="3"/>
           </p:nvPr>
         </p:nvSpPr>
         <p:spPr/>
@@ -2730,7 +2748,7 @@
             <a:spLocks noGrp="1"/>
           </p:cNvSpPr>
           <p:nvPr>
-            <p:ph type="sldNum" idx="5" sz="quarter"/>
+            <p:ph type="sldNum" sz="quarter" idx="5"/>
           </p:nvPr>
         </p:nvSpPr>
         <p:spPr/>
@@ -2744,7 +2762,7 @@
 </file>
 
 <file path=ppt/notesSlides/notesSlide5.xml><?xml version="1.0" encoding="utf-8"?>
-<p:notes xmlns:a="http://schemas.openxmlformats.org/drawingml/2006/main" xmlns:p="http://schemas.openxmlformats.org/presentationml/2006/main" xmlns:r="http://schemas.openxmlformats.org/officeDocument/2006/relationships">
+<p:notes xmlns:a="http://schemas.openxmlformats.org/drawingml/2006/main" xmlns:r="http://schemas.openxmlformats.org/officeDocument/2006/relationships" xmlns:p="http://schemas.openxmlformats.org/presentationml/2006/main">
   <p:cSld>
     <p:spTree>
       <p:nvGrpSpPr>
@@ -2764,7 +2782,7 @@
         <p:nvSpPr>
           <p:cNvPr id="2" name="Slide Image Placeholder 1"/>
           <p:cNvSpPr>
-            <a:spLocks noGrp="1"/>
+            <a:spLocks noGrp="1" noRot="1" noChangeAspect="1"/>
           </p:cNvSpPr>
           <p:nvPr>
             <p:ph type="sldImg" idx="2"/>
@@ -2779,7 +2797,7 @@
             <a:spLocks noGrp="1"/>
           </p:cNvSpPr>
           <p:nvPr>
-            <p:ph type="body" idx="3" sz="quarter"/>
+            <p:ph type="body" sz="quarter" idx="3"/>
           </p:nvPr>
         </p:nvSpPr>
         <p:spPr/>
@@ -2800,7 +2818,7 @@
             <a:spLocks noGrp="1"/>
           </p:cNvSpPr>
           <p:nvPr>
-            <p:ph type="sldNum" idx="5" sz="quarter"/>
+            <p:ph type="sldNum" sz="quarter" idx="5"/>
           </p:nvPr>
         </p:nvSpPr>
         <p:spPr/>
@@ -2814,7 +2832,7 @@
 </file>
 
 <file path=ppt/notesSlides/notesSlide6.xml><?xml version="1.0" encoding="utf-8"?>
-<p:notes xmlns:a="http://schemas.openxmlformats.org/drawingml/2006/main" xmlns:p="http://schemas.openxmlformats.org/presentationml/2006/main" xmlns:r="http://schemas.openxmlformats.org/officeDocument/2006/relationships">
+<p:notes xmlns:a="http://schemas.openxmlformats.org/drawingml/2006/main" xmlns:r="http://schemas.openxmlformats.org/officeDocument/2006/relationships" xmlns:p="http://schemas.openxmlformats.org/presentationml/2006/main">
   <p:cSld>
     <p:spTree>
       <p:nvGrpSpPr>
@@ -2834,7 +2852,7 @@
         <p:nvSpPr>
           <p:cNvPr id="2" name="Slide Image Placeholder 1"/>
           <p:cNvSpPr>
-            <a:spLocks noGrp="1"/>
+            <a:spLocks noGrp="1" noRot="1" noChangeAspect="1"/>
           </p:cNvSpPr>
           <p:nvPr>
             <p:ph type="sldImg" idx="2"/>
@@ -2849,7 +2867,7 @@
             <a:spLocks noGrp="1"/>
           </p:cNvSpPr>
           <p:nvPr>
-            <p:ph type="body" idx="3" sz="quarter"/>
+            <p:ph type="body" sz="quarter" idx="3"/>
           </p:nvPr>
         </p:nvSpPr>
         <p:spPr/>
@@ -2870,7 +2888,7 @@
             <a:spLocks noGrp="1"/>
           </p:cNvSpPr>
           <p:nvPr>
-            <p:ph type="sldNum" idx="5" sz="quarter"/>
+            <p:ph type="sldNum" sz="quarter" idx="5"/>
           </p:nvPr>
         </p:nvSpPr>
         <p:spPr/>
@@ -2884,7 +2902,7 @@
 </file>
 
 <file path=ppt/notesSlides/notesSlide7.xml><?xml version="1.0" encoding="utf-8"?>
-<p:notes xmlns:a="http://schemas.openxmlformats.org/drawingml/2006/main" xmlns:p="http://schemas.openxmlformats.org/presentationml/2006/main" xmlns:r="http://schemas.openxmlformats.org/officeDocument/2006/relationships">
+<p:notes xmlns:a="http://schemas.openxmlformats.org/drawingml/2006/main" xmlns:r="http://schemas.openxmlformats.org/officeDocument/2006/relationships" xmlns:p="http://schemas.openxmlformats.org/presentationml/2006/main">
   <p:cSld>
     <p:spTree>
       <p:nvGrpSpPr>
@@ -2904,7 +2922,7 @@
         <p:nvSpPr>
           <p:cNvPr id="2" name="Slide Image Placeholder 1"/>
           <p:cNvSpPr>
-            <a:spLocks noGrp="1"/>
+            <a:spLocks noGrp="1" noRot="1" noChangeAspect="1"/>
           </p:cNvSpPr>
           <p:nvPr>
             <p:ph type="sldImg" idx="2"/>
@@ -2919,7 +2937,7 @@
             <a:spLocks noGrp="1"/>
           </p:cNvSpPr>
           <p:nvPr>
-            <p:ph type="body" idx="3" sz="quarter"/>
+            <p:ph type="body" sz="quarter" idx="3"/>
           </p:nvPr>
         </p:nvSpPr>
         <p:spPr/>
@@ -2940,7 +2958,7 @@
             <a:spLocks noGrp="1"/>
           </p:cNvSpPr>
           <p:nvPr>
-            <p:ph type="sldNum" idx="5" sz="quarter"/>
+            <p:ph type="sldNum" sz="quarter" idx="5"/>
           </p:nvPr>
         </p:nvSpPr>
         <p:spPr/>
@@ -2954,7 +2972,7 @@
 </file>
 
 <file path=ppt/notesSlides/notesSlide8.xml><?xml version="1.0" encoding="utf-8"?>
-<p:notes xmlns:a="http://schemas.openxmlformats.org/drawingml/2006/main" xmlns:p="http://schemas.openxmlformats.org/presentationml/2006/main" xmlns:r="http://schemas.openxmlformats.org/officeDocument/2006/relationships">
+<p:notes xmlns:a="http://schemas.openxmlformats.org/drawingml/2006/main" xmlns:r="http://schemas.openxmlformats.org/officeDocument/2006/relationships" xmlns:p="http://schemas.openxmlformats.org/presentationml/2006/main">
   <p:cSld>
     <p:spTree>
       <p:nvGrpSpPr>
@@ -2974,7 +2992,7 @@
         <p:nvSpPr>
           <p:cNvPr id="2" name="Slide Image Placeholder 1"/>
           <p:cNvSpPr>
-            <a:spLocks noGrp="1"/>
+            <a:spLocks noGrp="1" noRot="1" noChangeAspect="1"/>
           </p:cNvSpPr>
           <p:nvPr>
             <p:ph type="sldImg" idx="2"/>
@@ -2989,7 +3007,7 @@
             <a:spLocks noGrp="1"/>
           </p:cNvSpPr>
           <p:nvPr>
-            <p:ph type="body" idx="3" sz="quarter"/>
+            <p:ph type="body" sz="quarter" idx="3"/>
           </p:nvPr>
         </p:nvSpPr>
         <p:spPr/>
@@ -3010,7 +3028,7 @@
             <a:spLocks noGrp="1"/>
           </p:cNvSpPr>
           <p:nvPr>
-            <p:ph type="sldNum" idx="5" sz="quarter"/>
+            <p:ph type="sldNum" sz="quarter" idx="5"/>
           </p:nvPr>
         </p:nvSpPr>
         <p:spPr/>
@@ -3024,7 +3042,7 @@
 </file>
 
 <file path=ppt/notesSlides/notesSlide9.xml><?xml version="1.0" encoding="utf-8"?>
-<p:notes xmlns:a="http://schemas.openxmlformats.org/drawingml/2006/main" xmlns:p="http://schemas.openxmlformats.org/presentationml/2006/main" xmlns:r="http://schemas.openxmlformats.org/officeDocument/2006/relationships">
+<p:notes xmlns:a="http://schemas.openxmlformats.org/drawingml/2006/main" xmlns:r="http://schemas.openxmlformats.org/officeDocument/2006/relationships" xmlns:p="http://schemas.openxmlformats.org/presentationml/2006/main">
   <p:cSld>
     <p:spTree>
       <p:nvGrpSpPr>
@@ -3044,7 +3062,7 @@
         <p:nvSpPr>
           <p:cNvPr id="2" name="Slide Image Placeholder 1"/>
           <p:cNvSpPr>
-            <a:spLocks noGrp="1"/>
+            <a:spLocks noGrp="1" noRot="1" noChangeAspect="1"/>
           </p:cNvSpPr>
           <p:nvPr>
             <p:ph type="sldImg" idx="2"/>
@@ -3059,7 +3077,7 @@
             <a:spLocks noGrp="1"/>
           </p:cNvSpPr>
           <p:nvPr>
-            <p:ph type="body" idx="3" sz="quarter"/>
+            <p:ph type="body" sz="quarter" idx="3"/>
           </p:nvPr>
         </p:nvSpPr>
         <p:spPr/>
@@ -3080,7 +3098,7 @@
             <a:spLocks noGrp="1"/>
           </p:cNvSpPr>
           <p:nvPr>
-            <p:ph type="sldNum" idx="5" sz="quarter"/>
+            <p:ph type="sldNum" sz="quarter" idx="5"/>
           </p:nvPr>
         </p:nvSpPr>
         <p:spPr/>
@@ -3131,10 +3149,9 @@
           <a:lstStyle/>
           <a:p>
             <a:r>
-              <a:rPr lang="en-US" smtClean="0"/>
+              <a:rPr lang="en-US"/>
               <a:t>Click to edit Master title style</a:t>
             </a:r>
-            <a:endParaRPr lang="en-US"/>
           </a:p>
         </p:txBody>
       </p:sp>
@@ -3250,10 +3267,9 @@
           </a:lstStyle>
           <a:p>
             <a:r>
-              <a:rPr lang="en-US" smtClean="0"/>
+              <a:rPr lang="en-US"/>
               <a:t>Click to edit Master subtitle style</a:t>
             </a:r>
-            <a:endParaRPr lang="en-US"/>
           </a:p>
         </p:txBody>
       </p:sp>
@@ -3274,7 +3290,7 @@
           <a:p>
             <a:fld id="{5BCAD085-E8A6-8845-BD4E-CB4CCA059FC4}" type="datetimeFigureOut">
               <a:rPr lang="en-US" smtClean="0"/>
-              <a:t>1/27/13</a:t>
+              <a:t>10/29/2026</a:t>
             </a:fld>
             <a:endParaRPr lang="en-US"/>
           </a:p>
@@ -3368,10 +3384,9 @@
           <a:lstStyle/>
           <a:p>
             <a:r>
-              <a:rPr lang="en-US" smtClean="0"/>
+              <a:rPr lang="en-US"/>
               <a:t>Click to edit Master title style</a:t>
             </a:r>
-            <a:endParaRPr lang="en-US"/>
           </a:p>
         </p:txBody>
       </p:sp>
@@ -3392,38 +3407,37 @@
           <a:p>
             <a:pPr lvl="0"/>
             <a:r>
-              <a:rPr lang="en-US" smtClean="0"/>
+              <a:rPr lang="en-US"/>
               <a:t>Click to edit Master text styles</a:t>
             </a:r>
           </a:p>
           <a:p>
             <a:pPr lvl="1"/>
             <a:r>
-              <a:rPr lang="en-US" smtClean="0"/>
+              <a:rPr lang="en-US"/>
               <a:t>Second level</a:t>
             </a:r>
           </a:p>
           <a:p>
             <a:pPr lvl="2"/>
             <a:r>
-              <a:rPr lang="en-US" smtClean="0"/>
+              <a:rPr lang="en-US"/>
               <a:t>Third level</a:t>
             </a:r>
           </a:p>
           <a:p>
             <a:pPr lvl="3"/>
             <a:r>
-              <a:rPr lang="en-US" smtClean="0"/>
+              <a:rPr lang="en-US"/>
               <a:t>Fourth level</a:t>
             </a:r>
           </a:p>
           <a:p>
             <a:pPr lvl="4"/>
             <a:r>
-              <a:rPr lang="en-US" smtClean="0"/>
+              <a:rPr lang="en-US"/>
               <a:t>Fifth level</a:t>
             </a:r>
-            <a:endParaRPr lang="en-US"/>
           </a:p>
         </p:txBody>
       </p:sp>
@@ -3444,7 +3458,7 @@
           <a:p>
             <a:fld id="{5BCAD085-E8A6-8845-BD4E-CB4CCA059FC4}" type="datetimeFigureOut">
               <a:rPr lang="en-US" smtClean="0"/>
-              <a:t>1/27/13</a:t>
+              <a:t>10/29/2026</a:t>
             </a:fld>
             <a:endParaRPr lang="en-US"/>
           </a:p>
@@ -3543,10 +3557,9 @@
           <a:lstStyle/>
           <a:p>
             <a:r>
-              <a:rPr lang="en-US" smtClean="0"/>
+              <a:rPr lang="en-US"/>
               <a:t>Click to edit Master title style</a:t>
             </a:r>
-            <a:endParaRPr lang="en-US"/>
           </a:p>
         </p:txBody>
       </p:sp>
@@ -3572,38 +3585,37 @@
           <a:p>
             <a:pPr lvl="0"/>
             <a:r>
-              <a:rPr lang="en-US" smtClean="0"/>
+              <a:rPr lang="en-US"/>
               <a:t>Click to edit Master text styles</a:t>
             </a:r>
           </a:p>
           <a:p>
             <a:pPr lvl="1"/>
             <a:r>
-              <a:rPr lang="en-US" smtClean="0"/>
+              <a:rPr lang="en-US"/>
               <a:t>Second level</a:t>
             </a:r>
           </a:p>
           <a:p>
             <a:pPr lvl="2"/>
             <a:r>
-              <a:rPr lang="en-US" smtClean="0"/>
+              <a:rPr lang="en-US"/>
               <a:t>Third level</a:t>
             </a:r>
           </a:p>
           <a:p>
             <a:pPr lvl="3"/>
             <a:r>
-              <a:rPr lang="en-US" smtClean="0"/>
+              <a:rPr lang="en-US"/>
               <a:t>Fourth level</a:t>
             </a:r>
           </a:p>
           <a:p>
             <a:pPr lvl="4"/>
             <a:r>
-              <a:rPr lang="en-US" smtClean="0"/>
+              <a:rPr lang="en-US"/>
               <a:t>Fifth level</a:t>
             </a:r>
-            <a:endParaRPr lang="en-US"/>
           </a:p>
         </p:txBody>
       </p:sp>
@@ -3624,7 +3636,7 @@
           <a:p>
             <a:fld id="{5BCAD085-E8A6-8845-BD4E-CB4CCA059FC4}" type="datetimeFigureOut">
               <a:rPr lang="en-US" smtClean="0"/>
-              <a:t>1/27/13</a:t>
+              <a:t>10/29/2026</a:t>
             </a:fld>
             <a:endParaRPr lang="en-US"/>
           </a:p>
@@ -3718,10 +3730,9 @@
           <a:lstStyle/>
           <a:p>
             <a:r>
-              <a:rPr lang="en-US" smtClean="0"/>
+              <a:rPr lang="en-US"/>
               <a:t>Click to edit Master title style</a:t>
             </a:r>
-            <a:endParaRPr lang="en-US"/>
           </a:p>
         </p:txBody>
       </p:sp>
@@ -3742,38 +3753,37 @@
           <a:p>
             <a:pPr lvl="0"/>
             <a:r>
-              <a:rPr lang="en-US" smtClean="0"/>
+              <a:rPr lang="en-US"/>
               <a:t>Click to edit Master text styles</a:t>
             </a:r>
           </a:p>
           <a:p>
             <a:pPr lvl="1"/>
             <a:r>
-              <a:rPr lang="en-US" smtClean="0"/>
+              <a:rPr lang="en-US"/>
               <a:t>Second level</a:t>
             </a:r>
           </a:p>
           <a:p>
             <a:pPr lvl="2"/>
             <a:r>
-              <a:rPr lang="en-US" smtClean="0"/>
+              <a:rPr lang="en-US"/>
               <a:t>Third level</a:t>
             </a:r>
           </a:p>
           <a:p>
             <a:pPr lvl="3"/>
             <a:r>
-              <a:rPr lang="en-US" smtClean="0"/>
+              <a:rPr lang="en-US"/>
               <a:t>Fourth level</a:t>
             </a:r>
           </a:p>
           <a:p>
             <a:pPr lvl="4"/>
             <a:r>
-              <a:rPr lang="en-US" smtClean="0"/>
+              <a:rPr lang="en-US"/>
               <a:t>Fifth level</a:t>
             </a:r>
-            <a:endParaRPr lang="en-US"/>
           </a:p>
         </p:txBody>
       </p:sp>
@@ -3794,7 +3804,7 @@
           <a:p>
             <a:fld id="{5BCAD085-E8A6-8845-BD4E-CB4CCA059FC4}" type="datetimeFigureOut">
               <a:rPr lang="en-US" smtClean="0"/>
-              <a:t>1/27/13</a:t>
+              <a:t>10/29/2026</a:t>
             </a:fld>
             <a:endParaRPr lang="en-US"/>
           </a:p>
@@ -3897,10 +3907,9 @@
           </a:lstStyle>
           <a:p>
             <a:r>
-              <a:rPr lang="en-US" smtClean="0"/>
+              <a:rPr lang="en-US"/>
               <a:t>Click to edit Master title style</a:t>
             </a:r>
-            <a:endParaRPr lang="en-US"/>
           </a:p>
         </p:txBody>
       </p:sp>
@@ -4017,7 +4026,7 @@
           <a:p>
             <a:pPr lvl="0"/>
             <a:r>
-              <a:rPr lang="en-US" smtClean="0"/>
+              <a:rPr lang="en-US"/>
               <a:t>Click to edit Master text styles</a:t>
             </a:r>
           </a:p>
@@ -4040,7 +4049,7 @@
           <a:p>
             <a:fld id="{5BCAD085-E8A6-8845-BD4E-CB4CCA059FC4}" type="datetimeFigureOut">
               <a:rPr lang="en-US" smtClean="0"/>
-              <a:t>1/27/13</a:t>
+              <a:t>10/29/2026</a:t>
             </a:fld>
             <a:endParaRPr lang="en-US"/>
           </a:p>
@@ -4134,10 +4143,9 @@
           <a:lstStyle/>
           <a:p>
             <a:r>
-              <a:rPr lang="en-US" smtClean="0"/>
+              <a:rPr lang="en-US"/>
               <a:t>Click to edit Master title style</a:t>
             </a:r>
-            <a:endParaRPr lang="en-US"/>
           </a:p>
         </p:txBody>
       </p:sp>
@@ -4191,38 +4199,37 @@
           <a:p>
             <a:pPr lvl="0"/>
             <a:r>
-              <a:rPr lang="en-US" smtClean="0"/>
+              <a:rPr lang="en-US"/>
               <a:t>Click to edit Master text styles</a:t>
             </a:r>
           </a:p>
           <a:p>
             <a:pPr lvl="1"/>
             <a:r>
-              <a:rPr lang="en-US" smtClean="0"/>
+              <a:rPr lang="en-US"/>
               <a:t>Second level</a:t>
             </a:r>
           </a:p>
           <a:p>
             <a:pPr lvl="2"/>
             <a:r>
-              <a:rPr lang="en-US" smtClean="0"/>
+              <a:rPr lang="en-US"/>
               <a:t>Third level</a:t>
             </a:r>
           </a:p>
           <a:p>
             <a:pPr lvl="3"/>
             <a:r>
-              <a:rPr lang="en-US" smtClean="0"/>
+              <a:rPr lang="en-US"/>
               <a:t>Fourth level</a:t>
             </a:r>
           </a:p>
           <a:p>
             <a:pPr lvl="4"/>
             <a:r>
-              <a:rPr lang="en-US" smtClean="0"/>
+              <a:rPr lang="en-US"/>
               <a:t>Fifth level</a:t>
             </a:r>
-            <a:endParaRPr lang="en-US"/>
           </a:p>
         </p:txBody>
       </p:sp>
@@ -4276,38 +4283,37 @@
           <a:p>
             <a:pPr lvl="0"/>
             <a:r>
-              <a:rPr lang="en-US" smtClean="0"/>
+              <a:rPr lang="en-US"/>
               <a:t>Click to edit Master text styles</a:t>
             </a:r>
           </a:p>
           <a:p>
             <a:pPr lvl="1"/>
             <a:r>
-              <a:rPr lang="en-US" smtClean="0"/>
+              <a:rPr lang="en-US"/>
               <a:t>Second level</a:t>
             </a:r>
           </a:p>
           <a:p>
             <a:pPr lvl="2"/>
             <a:r>
-              <a:rPr lang="en-US" smtClean="0"/>
+              <a:rPr lang="en-US"/>
               <a:t>Third level</a:t>
             </a:r>
           </a:p>
           <a:p>
             <a:pPr lvl="3"/>
             <a:r>
-              <a:rPr lang="en-US" smtClean="0"/>
+              <a:rPr lang="en-US"/>
               <a:t>Fourth level</a:t>
             </a:r>
           </a:p>
           <a:p>
             <a:pPr lvl="4"/>
             <a:r>
-              <a:rPr lang="en-US" smtClean="0"/>
+              <a:rPr lang="en-US"/>
               <a:t>Fifth level</a:t>
             </a:r>
-            <a:endParaRPr lang="en-US"/>
           </a:p>
         </p:txBody>
       </p:sp>
@@ -4328,7 +4334,7 @@
           <a:p>
             <a:fld id="{5BCAD085-E8A6-8845-BD4E-CB4CCA059FC4}" type="datetimeFigureOut">
               <a:rPr lang="en-US" smtClean="0"/>
-              <a:t>1/27/13</a:t>
+              <a:t>10/29/2026</a:t>
             </a:fld>
             <a:endParaRPr lang="en-US"/>
           </a:p>
@@ -4426,10 +4432,9 @@
           </a:lstStyle>
           <a:p>
             <a:r>
-              <a:rPr lang="en-US" smtClean="0"/>
+              <a:rPr lang="en-US"/>
               <a:t>Click to edit Master title style</a:t>
             </a:r>
-            <a:endParaRPr lang="en-US"/>
           </a:p>
         </p:txBody>
       </p:sp>
@@ -4492,7 +4497,7 @@
           <a:p>
             <a:pPr lvl="0"/>
             <a:r>
-              <a:rPr lang="en-US" smtClean="0"/>
+              <a:rPr lang="en-US"/>
               <a:t>Click to edit Master text styles</a:t>
             </a:r>
           </a:p>
@@ -4548,38 +4553,37 @@
           <a:p>
             <a:pPr lvl="0"/>
             <a:r>
-              <a:rPr lang="en-US" smtClean="0"/>
+              <a:rPr lang="en-US"/>
               <a:t>Click to edit Master text styles</a:t>
             </a:r>
           </a:p>
           <a:p>
             <a:pPr lvl="1"/>
             <a:r>
-              <a:rPr lang="en-US" smtClean="0"/>
+              <a:rPr lang="en-US"/>
               <a:t>Second level</a:t>
             </a:r>
           </a:p>
           <a:p>
             <a:pPr lvl="2"/>
             <a:r>
-              <a:rPr lang="en-US" smtClean="0"/>
+              <a:rPr lang="en-US"/>
               <a:t>Third level</a:t>
             </a:r>
           </a:p>
           <a:p>
             <a:pPr lvl="3"/>
             <a:r>
-              <a:rPr lang="en-US" smtClean="0"/>
+              <a:rPr lang="en-US"/>
               <a:t>Fourth level</a:t>
             </a:r>
           </a:p>
           <a:p>
             <a:pPr lvl="4"/>
             <a:r>
-              <a:rPr lang="en-US" smtClean="0"/>
+              <a:rPr lang="en-US"/>
               <a:t>Fifth level</a:t>
             </a:r>
-            <a:endParaRPr lang="en-US"/>
           </a:p>
         </p:txBody>
       </p:sp>
@@ -4642,7 +4646,7 @@
           <a:p>
             <a:pPr lvl="0"/>
             <a:r>
-              <a:rPr lang="en-US" smtClean="0"/>
+              <a:rPr lang="en-US"/>
               <a:t>Click to edit Master text styles</a:t>
             </a:r>
           </a:p>
@@ -4698,38 +4702,37 @@
           <a:p>
             <a:pPr lvl="0"/>
             <a:r>
-              <a:rPr lang="en-US" smtClean="0"/>
+              <a:rPr lang="en-US"/>
               <a:t>Click to edit Master text styles</a:t>
             </a:r>
           </a:p>
           <a:p>
             <a:pPr lvl="1"/>
             <a:r>
-              <a:rPr lang="en-US" smtClean="0"/>
+              <a:rPr lang="en-US"/>
               <a:t>Second level</a:t>
             </a:r>
           </a:p>
           <a:p>
             <a:pPr lvl="2"/>
             <a:r>
-              <a:rPr lang="en-US" smtClean="0"/>
+              <a:rPr lang="en-US"/>
               <a:t>Third level</a:t>
             </a:r>
           </a:p>
           <a:p>
             <a:pPr lvl="3"/>
             <a:r>
-              <a:rPr lang="en-US" smtClean="0"/>
+              <a:rPr lang="en-US"/>
               <a:t>Fourth level</a:t>
             </a:r>
           </a:p>
           <a:p>
             <a:pPr lvl="4"/>
             <a:r>
-              <a:rPr lang="en-US" smtClean="0"/>
+              <a:rPr lang="en-US"/>
               <a:t>Fifth level</a:t>
             </a:r>
-            <a:endParaRPr lang="en-US"/>
           </a:p>
         </p:txBody>
       </p:sp>
@@ -4750,7 +4753,7 @@
           <a:p>
             <a:fld id="{5BCAD085-E8A6-8845-BD4E-CB4CCA059FC4}" type="datetimeFigureOut">
               <a:rPr lang="en-US" smtClean="0"/>
-              <a:t>1/27/13</a:t>
+              <a:t>10/29/2026</a:t>
             </a:fld>
             <a:endParaRPr lang="en-US"/>
           </a:p>
@@ -4844,10 +4847,9 @@
           <a:lstStyle/>
           <a:p>
             <a:r>
-              <a:rPr lang="en-US" smtClean="0"/>
+              <a:rPr lang="en-US"/>
               <a:t>Click to edit Master title style</a:t>
             </a:r>
-            <a:endParaRPr lang="en-US"/>
           </a:p>
         </p:txBody>
       </p:sp>
@@ -4868,7 +4870,7 @@
           <a:p>
             <a:fld id="{5BCAD085-E8A6-8845-BD4E-CB4CCA059FC4}" type="datetimeFigureOut">
               <a:rPr lang="en-US" smtClean="0"/>
-              <a:t>1/27/13</a:t>
+              <a:t>10/29/2026</a:t>
             </a:fld>
             <a:endParaRPr lang="en-US"/>
           </a:p>
@@ -4963,7 +4965,7 @@
           <a:p>
             <a:fld id="{5BCAD085-E8A6-8845-BD4E-CB4CCA059FC4}" type="datetimeFigureOut">
               <a:rPr lang="en-US" smtClean="0"/>
-              <a:t>1/27/13</a:t>
+              <a:t>10/29/2026</a:t>
             </a:fld>
             <a:endParaRPr lang="en-US"/>
           </a:p>
@@ -5066,10 +5068,9 @@
           </a:lstStyle>
           <a:p>
             <a:r>
-              <a:rPr lang="en-US" smtClean="0"/>
+              <a:rPr lang="en-US"/>
               <a:t>Click to edit Master title style</a:t>
             </a:r>
-            <a:endParaRPr lang="en-US"/>
           </a:p>
         </p:txBody>
       </p:sp>
@@ -5123,38 +5124,37 @@
           <a:p>
             <a:pPr lvl="0"/>
             <a:r>
-              <a:rPr lang="en-US" smtClean="0"/>
+              <a:rPr lang="en-US"/>
               <a:t>Click to edit Master text styles</a:t>
             </a:r>
           </a:p>
           <a:p>
             <a:pPr lvl="1"/>
             <a:r>
-              <a:rPr lang="en-US" smtClean="0"/>
+              <a:rPr lang="en-US"/>
               <a:t>Second level</a:t>
             </a:r>
           </a:p>
           <a:p>
             <a:pPr lvl="2"/>
             <a:r>
-              <a:rPr lang="en-US" smtClean="0"/>
+              <a:rPr lang="en-US"/>
               <a:t>Third level</a:t>
             </a:r>
           </a:p>
           <a:p>
             <a:pPr lvl="3"/>
             <a:r>
-              <a:rPr lang="en-US" smtClean="0"/>
+              <a:rPr lang="en-US"/>
               <a:t>Fourth level</a:t>
             </a:r>
           </a:p>
           <a:p>
             <a:pPr lvl="4"/>
             <a:r>
-              <a:rPr lang="en-US" smtClean="0"/>
+              <a:rPr lang="en-US"/>
               <a:t>Fifth level</a:t>
             </a:r>
-            <a:endParaRPr lang="en-US"/>
           </a:p>
         </p:txBody>
       </p:sp>
@@ -5217,7 +5217,7 @@
           <a:p>
             <a:pPr lvl="0"/>
             <a:r>
-              <a:rPr lang="en-US" smtClean="0"/>
+              <a:rPr lang="en-US"/>
               <a:t>Click to edit Master text styles</a:t>
             </a:r>
           </a:p>
@@ -5240,7 +5240,7 @@
           <a:p>
             <a:fld id="{5BCAD085-E8A6-8845-BD4E-CB4CCA059FC4}" type="datetimeFigureOut">
               <a:rPr lang="en-US" smtClean="0"/>
-              <a:t>1/27/13</a:t>
+              <a:t>10/29/2026</a:t>
             </a:fld>
             <a:endParaRPr lang="en-US"/>
           </a:p>
@@ -5343,10 +5343,9 @@
           </a:lstStyle>
           <a:p>
             <a:r>
-              <a:rPr lang="en-US" smtClean="0"/>
+              <a:rPr lang="en-US"/>
               <a:t>Click to edit Master title style</a:t>
             </a:r>
-            <a:endParaRPr lang="en-US"/>
           </a:p>
         </p:txBody>
       </p:sp>
@@ -5470,7 +5469,7 @@
           <a:p>
             <a:pPr lvl="0"/>
             <a:r>
-              <a:rPr lang="en-US" smtClean="0"/>
+              <a:rPr lang="en-US"/>
               <a:t>Click to edit Master text styles</a:t>
             </a:r>
           </a:p>
@@ -5493,7 +5492,7 @@
           <a:p>
             <a:fld id="{5BCAD085-E8A6-8845-BD4E-CB4CCA059FC4}" type="datetimeFigureOut">
               <a:rPr lang="en-US" smtClean="0"/>
-              <a:t>1/27/13</a:t>
+              <a:t>10/29/2026</a:t>
             </a:fld>
             <a:endParaRPr lang="en-US"/>
           </a:p>
@@ -5602,10 +5601,9 @@
           <a:lstStyle/>
           <a:p>
             <a:r>
-              <a:rPr lang="en-US" smtClean="0"/>
+              <a:rPr lang="en-US"/>
               <a:t>Click to edit Master title style</a:t>
             </a:r>
-            <a:endParaRPr lang="en-US"/>
           </a:p>
         </p:txBody>
       </p:sp>
@@ -5636,38 +5634,37 @@
           <a:p>
             <a:pPr lvl="0"/>
             <a:r>
-              <a:rPr lang="en-US" smtClean="0"/>
+              <a:rPr lang="en-US"/>
               <a:t>Click to edit Master text styles</a:t>
             </a:r>
           </a:p>
           <a:p>
             <a:pPr lvl="1"/>
             <a:r>
-              <a:rPr lang="en-US" smtClean="0"/>
+              <a:rPr lang="en-US"/>
               <a:t>Second level</a:t>
             </a:r>
           </a:p>
           <a:p>
             <a:pPr lvl="2"/>
             <a:r>
-              <a:rPr lang="en-US" smtClean="0"/>
+              <a:rPr lang="en-US"/>
               <a:t>Third level</a:t>
             </a:r>
           </a:p>
           <a:p>
             <a:pPr lvl="3"/>
             <a:r>
-              <a:rPr lang="en-US" smtClean="0"/>
+              <a:rPr lang="en-US"/>
               <a:t>Fourth level</a:t>
             </a:r>
           </a:p>
           <a:p>
             <a:pPr lvl="4"/>
             <a:r>
-              <a:rPr lang="en-US" smtClean="0"/>
+              <a:rPr lang="en-US"/>
               <a:t>Fifth level</a:t>
             </a:r>
-            <a:endParaRPr lang="en-US"/>
           </a:p>
         </p:txBody>
       </p:sp>
@@ -5706,7 +5703,7 @@
           <a:p>
             <a:fld id="{5BCAD085-E8A6-8845-BD4E-CB4CCA059FC4}" type="datetimeFigureOut">
               <a:rPr lang="en-US" smtClean="0"/>
-              <a:t>1/27/13</a:t>
+              <a:t>10/29/2026</a:t>
             </a:fld>
             <a:endParaRPr lang="en-US"/>
           </a:p>
@@ -6065,7 +6062,7 @@
 </file>
 
 <file path=ppt/slides/slide1.xml><?xml version="1.0" encoding="utf-8"?>
-<p:sld xmlns:a="http://schemas.openxmlformats.org/drawingml/2006/main" xmlns:p="http://schemas.openxmlformats.org/presentationml/2006/main" xmlns:r="http://schemas.openxmlformats.org/officeDocument/2006/relationships">
+<p:sld xmlns:a="http://schemas.openxmlformats.org/drawingml/2006/main" xmlns:r="http://schemas.openxmlformats.org/officeDocument/2006/relationships" xmlns:p="http://schemas.openxmlformats.org/presentationml/2006/main">
   <p:cSld>
     <p:spTree>
       <p:nvGrpSpPr>
@@ -6073,7 +6070,14 @@
         <p:cNvGrpSpPr/>
         <p:nvPr/>
       </p:nvGrpSpPr>
-      <p:grpSpPr/>
+      <p:grpSpPr>
+        <a:xfrm>
+          <a:off x="0" y="0"/>
+          <a:ext cx="0" cy="0"/>
+          <a:chOff x="0" y="0"/>
+          <a:chExt cx="0" cy="0"/>
+        </a:xfrm>
+      </p:grpSpPr>
       <p:sp>
         <p:nvSpPr>
           <p:cNvPr id="2" name="Rectangle 1"/>
@@ -6115,6 +6119,7 @@
           <a:lstStyle/>
           <a:p>
             <a:pPr algn="ctr"/>
+            <a:endParaRPr/>
           </a:p>
         </p:txBody>
       </p:sp>
@@ -6159,6 +6164,7 @@
           <a:lstStyle/>
           <a:p>
             <a:pPr algn="ctr"/>
+            <a:endParaRPr/>
           </a:p>
         </p:txBody>
       </p:sp>
@@ -6203,6 +6209,7 @@
           <a:lstStyle/>
           <a:p>
             <a:pPr algn="ctr"/>
+            <a:endParaRPr/>
           </a:p>
         </p:txBody>
       </p:sp>
@@ -6254,7 +6261,7 @@
         <p:spPr>
           <a:xfrm>
             <a:off x="731520" y="2377440"/>
-            <a:ext cx="10698480" cy="1554480"/>
+            <a:ext cx="10698480" cy="615553"/>
           </a:xfrm>
           <a:prstGeom prst="rect">
             <a:avLst/>
@@ -6267,20 +6274,26 @@
           </a:bodyPr>
           <a:lstStyle/>
           <a:p>
-            <a:pPr algn="l">
+            <a:pPr>
               <a:spcAft>
                 <a:spcPts val="600"/>
               </a:spcAft>
             </a:pPr>
             <a:r>
-              <a:rPr sz="3400" b="1">
+              <a:rPr lang="ko-KR" altLang="en-US" sz="3400" b="1" dirty="0">
                 <a:solidFill>
                   <a:srgbClr val="C0392B"/>
                 </a:solidFill>
                 <a:latin typeface="맑은 고딕"/>
               </a:rPr>
-              <a:t>RAC</a:t>
-            </a:r>
+              <a:t>진단 성능 종합운영</a:t>
+            </a:r>
+            <a:endParaRPr sz="3400" b="1" dirty="0">
+              <a:solidFill>
+                <a:srgbClr val="C0392B"/>
+              </a:solidFill>
+              <a:latin typeface="맑은 고딕"/>
+            </a:endParaRPr>
           </a:p>
         </p:txBody>
       </p:sp>
@@ -6371,7 +6384,7 @@
 </file>
 
 <file path=ppt/slides/slide10.xml><?xml version="1.0" encoding="utf-8"?>
-<p:sld xmlns:a="http://schemas.openxmlformats.org/drawingml/2006/main" xmlns:p="http://schemas.openxmlformats.org/presentationml/2006/main" xmlns:r="http://schemas.openxmlformats.org/officeDocument/2006/relationships">
+<p:sld xmlns:a="http://schemas.openxmlformats.org/drawingml/2006/main" xmlns:r="http://schemas.openxmlformats.org/officeDocument/2006/relationships" xmlns:p="http://schemas.openxmlformats.org/presentationml/2006/main">
   <p:cSld>
     <p:spTree>
       <p:nvGrpSpPr>
@@ -6379,7 +6392,14 @@
         <p:cNvGrpSpPr/>
         <p:nvPr/>
       </p:nvGrpSpPr>
-      <p:grpSpPr/>
+      <p:grpSpPr>
+        <a:xfrm>
+          <a:off x="0" y="0"/>
+          <a:ext cx="0" cy="0"/>
+          <a:chOff x="0" y="0"/>
+          <a:chExt cx="0" cy="0"/>
+        </a:xfrm>
+      </p:grpSpPr>
       <p:sp>
         <p:nvSpPr>
           <p:cNvPr id="2" name="Rectangle 1"/>
@@ -6421,6 +6441,7 @@
           <a:lstStyle/>
           <a:p>
             <a:pPr algn="ctr"/>
+            <a:endParaRPr/>
           </a:p>
         </p:txBody>
       </p:sp>
@@ -6614,7 +6635,7 @@
 </file>
 
 <file path=ppt/slides/slide11.xml><?xml version="1.0" encoding="utf-8"?>
-<p:sld xmlns:a="http://schemas.openxmlformats.org/drawingml/2006/main" xmlns:p="http://schemas.openxmlformats.org/presentationml/2006/main" xmlns:r="http://schemas.openxmlformats.org/officeDocument/2006/relationships">
+<p:sld xmlns:a="http://schemas.openxmlformats.org/drawingml/2006/main" xmlns:r="http://schemas.openxmlformats.org/officeDocument/2006/relationships" xmlns:p="http://schemas.openxmlformats.org/presentationml/2006/main">
   <p:cSld>
     <p:spTree>
       <p:nvGrpSpPr>
@@ -6622,7 +6643,14 @@
         <p:cNvGrpSpPr/>
         <p:nvPr/>
       </p:nvGrpSpPr>
-      <p:grpSpPr/>
+      <p:grpSpPr>
+        <a:xfrm>
+          <a:off x="0" y="0"/>
+          <a:ext cx="0" cy="0"/>
+          <a:chOff x="0" y="0"/>
+          <a:chExt cx="0" cy="0"/>
+        </a:xfrm>
+      </p:grpSpPr>
       <p:sp>
         <p:nvSpPr>
           <p:cNvPr id="2" name="Rectangle 1"/>
@@ -6664,6 +6692,7 @@
           <a:lstStyle/>
           <a:p>
             <a:pPr algn="ctr"/>
+            <a:endParaRPr/>
           </a:p>
         </p:txBody>
       </p:sp>
@@ -6786,6 +6815,7 @@
           <a:lstStyle/>
           <a:p>
             <a:pPr algn="ctr"/>
+            <a:endParaRPr/>
           </a:p>
         </p:txBody>
       </p:sp>
@@ -6853,7 +6883,7 @@
 </file>
 
 <file path=ppt/slides/slide12.xml><?xml version="1.0" encoding="utf-8"?>
-<p:sld xmlns:a="http://schemas.openxmlformats.org/drawingml/2006/main" xmlns:p="http://schemas.openxmlformats.org/presentationml/2006/main" xmlns:r="http://schemas.openxmlformats.org/officeDocument/2006/relationships">
+<p:sld xmlns:a="http://schemas.openxmlformats.org/drawingml/2006/main" xmlns:r="http://schemas.openxmlformats.org/officeDocument/2006/relationships" xmlns:p="http://schemas.openxmlformats.org/presentationml/2006/main">
   <p:cSld>
     <p:spTree>
       <p:nvGrpSpPr>
@@ -6861,7 +6891,14 @@
         <p:cNvGrpSpPr/>
         <p:nvPr/>
       </p:nvGrpSpPr>
-      <p:grpSpPr/>
+      <p:grpSpPr>
+        <a:xfrm>
+          <a:off x="0" y="0"/>
+          <a:ext cx="0" cy="0"/>
+          <a:chOff x="0" y="0"/>
+          <a:chExt cx="0" cy="0"/>
+        </a:xfrm>
+      </p:grpSpPr>
       <p:sp>
         <p:nvSpPr>
           <p:cNvPr id="2" name="Rectangle 1"/>
@@ -6903,6 +6940,7 @@
           <a:lstStyle/>
           <a:p>
             <a:pPr algn="ctr"/>
+            <a:endParaRPr/>
           </a:p>
         </p:txBody>
       </p:sp>
@@ -7096,7 +7134,7 @@
 </file>
 
 <file path=ppt/slides/slide13.xml><?xml version="1.0" encoding="utf-8"?>
-<p:sld xmlns:a="http://schemas.openxmlformats.org/drawingml/2006/main" xmlns:p="http://schemas.openxmlformats.org/presentationml/2006/main" xmlns:r="http://schemas.openxmlformats.org/officeDocument/2006/relationships">
+<p:sld xmlns:a="http://schemas.openxmlformats.org/drawingml/2006/main" xmlns:r="http://schemas.openxmlformats.org/officeDocument/2006/relationships" xmlns:p="http://schemas.openxmlformats.org/presentationml/2006/main">
   <p:cSld>
     <p:spTree>
       <p:nvGrpSpPr>
@@ -7104,7 +7142,14 @@
         <p:cNvGrpSpPr/>
         <p:nvPr/>
       </p:nvGrpSpPr>
-      <p:grpSpPr/>
+      <p:grpSpPr>
+        <a:xfrm>
+          <a:off x="0" y="0"/>
+          <a:ext cx="0" cy="0"/>
+          <a:chOff x="0" y="0"/>
+          <a:chExt cx="0" cy="0"/>
+        </a:xfrm>
+      </p:grpSpPr>
       <p:sp>
         <p:nvSpPr>
           <p:cNvPr id="2" name="Rectangle 1"/>
@@ -7146,6 +7191,7 @@
           <a:lstStyle/>
           <a:p>
             <a:pPr algn="ctr"/>
+            <a:endParaRPr/>
           </a:p>
         </p:txBody>
       </p:sp>
@@ -7339,7 +7385,7 @@
 </file>
 
 <file path=ppt/slides/slide14.xml><?xml version="1.0" encoding="utf-8"?>
-<p:sld xmlns:a="http://schemas.openxmlformats.org/drawingml/2006/main" xmlns:p="http://schemas.openxmlformats.org/presentationml/2006/main" xmlns:r="http://schemas.openxmlformats.org/officeDocument/2006/relationships">
+<p:sld xmlns:a="http://schemas.openxmlformats.org/drawingml/2006/main" xmlns:r="http://schemas.openxmlformats.org/officeDocument/2006/relationships" xmlns:p="http://schemas.openxmlformats.org/presentationml/2006/main">
   <p:cSld>
     <p:spTree>
       <p:nvGrpSpPr>
@@ -7347,7 +7393,14 @@
         <p:cNvGrpSpPr/>
         <p:nvPr/>
       </p:nvGrpSpPr>
-      <p:grpSpPr/>
+      <p:grpSpPr>
+        <a:xfrm>
+          <a:off x="0" y="0"/>
+          <a:ext cx="0" cy="0"/>
+          <a:chOff x="0" y="0"/>
+          <a:chExt cx="0" cy="0"/>
+        </a:xfrm>
+      </p:grpSpPr>
       <p:sp>
         <p:nvSpPr>
           <p:cNvPr id="2" name="Rectangle 1"/>
@@ -7389,6 +7442,7 @@
           <a:lstStyle/>
           <a:p>
             <a:pPr algn="ctr"/>
+            <a:endParaRPr/>
           </a:p>
         </p:txBody>
       </p:sp>
@@ -7582,7 +7636,7 @@
 </file>
 
 <file path=ppt/slides/slide15.xml><?xml version="1.0" encoding="utf-8"?>
-<p:sld xmlns:a="http://schemas.openxmlformats.org/drawingml/2006/main" xmlns:p="http://schemas.openxmlformats.org/presentationml/2006/main" xmlns:r="http://schemas.openxmlformats.org/officeDocument/2006/relationships">
+<p:sld xmlns:a="http://schemas.openxmlformats.org/drawingml/2006/main" xmlns:r="http://schemas.openxmlformats.org/officeDocument/2006/relationships" xmlns:p="http://schemas.openxmlformats.org/presentationml/2006/main">
   <p:cSld>
     <p:spTree>
       <p:nvGrpSpPr>
@@ -7590,7 +7644,14 @@
         <p:cNvGrpSpPr/>
         <p:nvPr/>
       </p:nvGrpSpPr>
-      <p:grpSpPr/>
+      <p:grpSpPr>
+        <a:xfrm>
+          <a:off x="0" y="0"/>
+          <a:ext cx="0" cy="0"/>
+          <a:chOff x="0" y="0"/>
+          <a:chExt cx="0" cy="0"/>
+        </a:xfrm>
+      </p:grpSpPr>
       <p:sp>
         <p:nvSpPr>
           <p:cNvPr id="2" name="Rectangle 1"/>
@@ -7632,6 +7693,7 @@
           <a:lstStyle/>
           <a:p>
             <a:pPr algn="ctr"/>
+            <a:endParaRPr/>
           </a:p>
         </p:txBody>
       </p:sp>
@@ -7825,7 +7887,7 @@
 </file>
 
 <file path=ppt/slides/slide16.xml><?xml version="1.0" encoding="utf-8"?>
-<p:sld xmlns:a="http://schemas.openxmlformats.org/drawingml/2006/main" xmlns:p="http://schemas.openxmlformats.org/presentationml/2006/main" xmlns:r="http://schemas.openxmlformats.org/officeDocument/2006/relationships">
+<p:sld xmlns:a="http://schemas.openxmlformats.org/drawingml/2006/main" xmlns:r="http://schemas.openxmlformats.org/officeDocument/2006/relationships" xmlns:p="http://schemas.openxmlformats.org/presentationml/2006/main">
   <p:cSld>
     <p:spTree>
       <p:nvGrpSpPr>
@@ -7833,7 +7895,14 @@
         <p:cNvGrpSpPr/>
         <p:nvPr/>
       </p:nvGrpSpPr>
-      <p:grpSpPr/>
+      <p:grpSpPr>
+        <a:xfrm>
+          <a:off x="0" y="0"/>
+          <a:ext cx="0" cy="0"/>
+          <a:chOff x="0" y="0"/>
+          <a:chExt cx="0" cy="0"/>
+        </a:xfrm>
+      </p:grpSpPr>
       <p:sp>
         <p:nvSpPr>
           <p:cNvPr id="2" name="Rectangle 1"/>
@@ -7875,6 +7944,7 @@
           <a:lstStyle/>
           <a:p>
             <a:pPr algn="ctr"/>
+            <a:endParaRPr/>
           </a:p>
         </p:txBody>
       </p:sp>
@@ -8068,7 +8138,7 @@
 </file>
 
 <file path=ppt/slides/slide17.xml><?xml version="1.0" encoding="utf-8"?>
-<p:sld xmlns:a="http://schemas.openxmlformats.org/drawingml/2006/main" xmlns:p="http://schemas.openxmlformats.org/presentationml/2006/main" xmlns:r="http://schemas.openxmlformats.org/officeDocument/2006/relationships">
+<p:sld xmlns:a="http://schemas.openxmlformats.org/drawingml/2006/main" xmlns:r="http://schemas.openxmlformats.org/officeDocument/2006/relationships" xmlns:p="http://schemas.openxmlformats.org/presentationml/2006/main">
   <p:cSld>
     <p:spTree>
       <p:nvGrpSpPr>
@@ -8076,7 +8146,14 @@
         <p:cNvGrpSpPr/>
         <p:nvPr/>
       </p:nvGrpSpPr>
-      <p:grpSpPr/>
+      <p:grpSpPr>
+        <a:xfrm>
+          <a:off x="0" y="0"/>
+          <a:ext cx="0" cy="0"/>
+          <a:chOff x="0" y="0"/>
+          <a:chExt cx="0" cy="0"/>
+        </a:xfrm>
+      </p:grpSpPr>
       <p:sp>
         <p:nvSpPr>
           <p:cNvPr id="2" name="Rectangle 1"/>
@@ -8118,6 +8195,7 @@
           <a:lstStyle/>
           <a:p>
             <a:pPr algn="ctr"/>
+            <a:endParaRPr/>
           </a:p>
         </p:txBody>
       </p:sp>
@@ -8311,7 +8389,7 @@
 </file>
 
 <file path=ppt/slides/slide18.xml><?xml version="1.0" encoding="utf-8"?>
-<p:sld xmlns:a="http://schemas.openxmlformats.org/drawingml/2006/main" xmlns:p="http://schemas.openxmlformats.org/presentationml/2006/main" xmlns:r="http://schemas.openxmlformats.org/officeDocument/2006/relationships">
+<p:sld xmlns:a="http://schemas.openxmlformats.org/drawingml/2006/main" xmlns:r="http://schemas.openxmlformats.org/officeDocument/2006/relationships" xmlns:p="http://schemas.openxmlformats.org/presentationml/2006/main">
   <p:cSld>
     <p:spTree>
       <p:nvGrpSpPr>
@@ -8319,7 +8397,14 @@
         <p:cNvGrpSpPr/>
         <p:nvPr/>
       </p:nvGrpSpPr>
-      <p:grpSpPr/>
+      <p:grpSpPr>
+        <a:xfrm>
+          <a:off x="0" y="0"/>
+          <a:ext cx="0" cy="0"/>
+          <a:chOff x="0" y="0"/>
+          <a:chExt cx="0" cy="0"/>
+        </a:xfrm>
+      </p:grpSpPr>
       <p:sp>
         <p:nvSpPr>
           <p:cNvPr id="2" name="Rectangle 1"/>
@@ -8361,6 +8446,7 @@
           <a:lstStyle/>
           <a:p>
             <a:pPr algn="ctr"/>
+            <a:endParaRPr/>
           </a:p>
         </p:txBody>
       </p:sp>
@@ -8554,7 +8640,7 @@
 </file>
 
 <file path=ppt/slides/slide19.xml><?xml version="1.0" encoding="utf-8"?>
-<p:sld xmlns:a="http://schemas.openxmlformats.org/drawingml/2006/main" xmlns:p="http://schemas.openxmlformats.org/presentationml/2006/main" xmlns:r="http://schemas.openxmlformats.org/officeDocument/2006/relationships">
+<p:sld xmlns:a="http://schemas.openxmlformats.org/drawingml/2006/main" xmlns:r="http://schemas.openxmlformats.org/officeDocument/2006/relationships" xmlns:p="http://schemas.openxmlformats.org/presentationml/2006/main">
   <p:cSld>
     <p:spTree>
       <p:nvGrpSpPr>
@@ -8562,7 +8648,14 @@
         <p:cNvGrpSpPr/>
         <p:nvPr/>
       </p:nvGrpSpPr>
-      <p:grpSpPr/>
+      <p:grpSpPr>
+        <a:xfrm>
+          <a:off x="0" y="0"/>
+          <a:ext cx="0" cy="0"/>
+          <a:chOff x="0" y="0"/>
+          <a:chExt cx="0" cy="0"/>
+        </a:xfrm>
+      </p:grpSpPr>
       <p:sp>
         <p:nvSpPr>
           <p:cNvPr id="2" name="Rectangle 1"/>
@@ -8604,6 +8697,7 @@
           <a:lstStyle/>
           <a:p>
             <a:pPr algn="ctr"/>
+            <a:endParaRPr/>
           </a:p>
         </p:txBody>
       </p:sp>
@@ -8797,7 +8891,7 @@
 </file>
 
 <file path=ppt/slides/slide2.xml><?xml version="1.0" encoding="utf-8"?>
-<p:sld xmlns:a="http://schemas.openxmlformats.org/drawingml/2006/main" xmlns:p="http://schemas.openxmlformats.org/presentationml/2006/main" xmlns:r="http://schemas.openxmlformats.org/officeDocument/2006/relationships">
+<p:sld xmlns:a="http://schemas.openxmlformats.org/drawingml/2006/main" xmlns:r="http://schemas.openxmlformats.org/officeDocument/2006/relationships" xmlns:p="http://schemas.openxmlformats.org/presentationml/2006/main">
   <p:cSld>
     <p:spTree>
       <p:nvGrpSpPr>
@@ -8805,7 +8899,14 @@
         <p:cNvGrpSpPr/>
         <p:nvPr/>
       </p:nvGrpSpPr>
-      <p:grpSpPr/>
+      <p:grpSpPr>
+        <a:xfrm>
+          <a:off x="0" y="0"/>
+          <a:ext cx="0" cy="0"/>
+          <a:chOff x="0" y="0"/>
+          <a:chExt cx="0" cy="0"/>
+        </a:xfrm>
+      </p:grpSpPr>
       <p:sp>
         <p:nvSpPr>
           <p:cNvPr id="2" name="Rectangle 1"/>
@@ -8847,6 +8948,7 @@
           <a:lstStyle/>
           <a:p>
             <a:pPr algn="ctr"/>
+            <a:endParaRPr/>
           </a:p>
         </p:txBody>
       </p:sp>
@@ -9033,7 +9135,7 @@
 </file>
 
 <file path=ppt/slides/slide20.xml><?xml version="1.0" encoding="utf-8"?>
-<p:sld xmlns:a="http://schemas.openxmlformats.org/drawingml/2006/main" xmlns:p="http://schemas.openxmlformats.org/presentationml/2006/main" xmlns:r="http://schemas.openxmlformats.org/officeDocument/2006/relationships">
+<p:sld xmlns:a="http://schemas.openxmlformats.org/drawingml/2006/main" xmlns:r="http://schemas.openxmlformats.org/officeDocument/2006/relationships" xmlns:p="http://schemas.openxmlformats.org/presentationml/2006/main">
   <p:cSld>
     <p:spTree>
       <p:nvGrpSpPr>
@@ -9041,7 +9143,14 @@
         <p:cNvGrpSpPr/>
         <p:nvPr/>
       </p:nvGrpSpPr>
-      <p:grpSpPr/>
+      <p:grpSpPr>
+        <a:xfrm>
+          <a:off x="0" y="0"/>
+          <a:ext cx="0" cy="0"/>
+          <a:chOff x="0" y="0"/>
+          <a:chExt cx="0" cy="0"/>
+        </a:xfrm>
+      </p:grpSpPr>
       <p:sp>
         <p:nvSpPr>
           <p:cNvPr id="2" name="Rectangle 1"/>
@@ -9083,6 +9192,7 @@
           <a:lstStyle/>
           <a:p>
             <a:pPr algn="ctr"/>
+            <a:endParaRPr/>
           </a:p>
         </p:txBody>
       </p:sp>
@@ -9205,6 +9315,7 @@
           <a:lstStyle/>
           <a:p>
             <a:pPr algn="ctr"/>
+            <a:endParaRPr/>
           </a:p>
         </p:txBody>
       </p:sp>
@@ -9272,7 +9383,7 @@
 </file>
 
 <file path=ppt/slides/slide21.xml><?xml version="1.0" encoding="utf-8"?>
-<p:sld xmlns:a="http://schemas.openxmlformats.org/drawingml/2006/main" xmlns:p="http://schemas.openxmlformats.org/presentationml/2006/main" xmlns:r="http://schemas.openxmlformats.org/officeDocument/2006/relationships">
+<p:sld xmlns:a="http://schemas.openxmlformats.org/drawingml/2006/main" xmlns:r="http://schemas.openxmlformats.org/officeDocument/2006/relationships" xmlns:p="http://schemas.openxmlformats.org/presentationml/2006/main">
   <p:cSld>
     <p:spTree>
       <p:nvGrpSpPr>
@@ -9280,7 +9391,14 @@
         <p:cNvGrpSpPr/>
         <p:nvPr/>
       </p:nvGrpSpPr>
-      <p:grpSpPr/>
+      <p:grpSpPr>
+        <a:xfrm>
+          <a:off x="0" y="0"/>
+          <a:ext cx="0" cy="0"/>
+          <a:chOff x="0" y="0"/>
+          <a:chExt cx="0" cy="0"/>
+        </a:xfrm>
+      </p:grpSpPr>
       <p:sp>
         <p:nvSpPr>
           <p:cNvPr id="2" name="Rectangle 1"/>
@@ -9322,6 +9440,7 @@
           <a:lstStyle/>
           <a:p>
             <a:pPr algn="ctr"/>
+            <a:endParaRPr/>
           </a:p>
         </p:txBody>
       </p:sp>
@@ -9515,7 +9634,7 @@
 </file>
 
 <file path=ppt/slides/slide22.xml><?xml version="1.0" encoding="utf-8"?>
-<p:sld xmlns:a="http://schemas.openxmlformats.org/drawingml/2006/main" xmlns:p="http://schemas.openxmlformats.org/presentationml/2006/main" xmlns:r="http://schemas.openxmlformats.org/officeDocument/2006/relationships">
+<p:sld xmlns:a="http://schemas.openxmlformats.org/drawingml/2006/main" xmlns:r="http://schemas.openxmlformats.org/officeDocument/2006/relationships" xmlns:p="http://schemas.openxmlformats.org/presentationml/2006/main">
   <p:cSld>
     <p:spTree>
       <p:nvGrpSpPr>
@@ -9523,7 +9642,14 @@
         <p:cNvGrpSpPr/>
         <p:nvPr/>
       </p:nvGrpSpPr>
-      <p:grpSpPr/>
+      <p:grpSpPr>
+        <a:xfrm>
+          <a:off x="0" y="0"/>
+          <a:ext cx="0" cy="0"/>
+          <a:chOff x="0" y="0"/>
+          <a:chExt cx="0" cy="0"/>
+        </a:xfrm>
+      </p:grpSpPr>
       <p:sp>
         <p:nvSpPr>
           <p:cNvPr id="2" name="Rectangle 1"/>
@@ -9565,6 +9691,7 @@
           <a:lstStyle/>
           <a:p>
             <a:pPr algn="ctr"/>
+            <a:endParaRPr/>
           </a:p>
         </p:txBody>
       </p:sp>
@@ -9758,7 +9885,7 @@
 </file>
 
 <file path=ppt/slides/slide23.xml><?xml version="1.0" encoding="utf-8"?>
-<p:sld xmlns:a="http://schemas.openxmlformats.org/drawingml/2006/main" xmlns:p="http://schemas.openxmlformats.org/presentationml/2006/main" xmlns:r="http://schemas.openxmlformats.org/officeDocument/2006/relationships">
+<p:sld xmlns:a="http://schemas.openxmlformats.org/drawingml/2006/main" xmlns:r="http://schemas.openxmlformats.org/officeDocument/2006/relationships" xmlns:p="http://schemas.openxmlformats.org/presentationml/2006/main">
   <p:cSld>
     <p:spTree>
       <p:nvGrpSpPr>
@@ -9766,7 +9893,14 @@
         <p:cNvGrpSpPr/>
         <p:nvPr/>
       </p:nvGrpSpPr>
-      <p:grpSpPr/>
+      <p:grpSpPr>
+        <a:xfrm>
+          <a:off x="0" y="0"/>
+          <a:ext cx="0" cy="0"/>
+          <a:chOff x="0" y="0"/>
+          <a:chExt cx="0" cy="0"/>
+        </a:xfrm>
+      </p:grpSpPr>
       <p:sp>
         <p:nvSpPr>
           <p:cNvPr id="2" name="Rectangle 1"/>
@@ -9808,6 +9942,7 @@
           <a:lstStyle/>
           <a:p>
             <a:pPr algn="ctr"/>
+            <a:endParaRPr/>
           </a:p>
         </p:txBody>
       </p:sp>
@@ -10001,7 +10136,7 @@
 </file>
 
 <file path=ppt/slides/slide24.xml><?xml version="1.0" encoding="utf-8"?>
-<p:sld xmlns:a="http://schemas.openxmlformats.org/drawingml/2006/main" xmlns:p="http://schemas.openxmlformats.org/presentationml/2006/main" xmlns:r="http://schemas.openxmlformats.org/officeDocument/2006/relationships">
+<p:sld xmlns:a="http://schemas.openxmlformats.org/drawingml/2006/main" xmlns:r="http://schemas.openxmlformats.org/officeDocument/2006/relationships" xmlns:p="http://schemas.openxmlformats.org/presentationml/2006/main">
   <p:cSld>
     <p:spTree>
       <p:nvGrpSpPr>
@@ -10009,7 +10144,14 @@
         <p:cNvGrpSpPr/>
         <p:nvPr/>
       </p:nvGrpSpPr>
-      <p:grpSpPr/>
+      <p:grpSpPr>
+        <a:xfrm>
+          <a:off x="0" y="0"/>
+          <a:ext cx="0" cy="0"/>
+          <a:chOff x="0" y="0"/>
+          <a:chExt cx="0" cy="0"/>
+        </a:xfrm>
+      </p:grpSpPr>
       <p:sp>
         <p:nvSpPr>
           <p:cNvPr id="2" name="Rectangle 1"/>
@@ -10051,6 +10193,7 @@
           <a:lstStyle/>
           <a:p>
             <a:pPr algn="ctr"/>
+            <a:endParaRPr/>
           </a:p>
         </p:txBody>
       </p:sp>
@@ -10244,7 +10387,7 @@
 </file>
 
 <file path=ppt/slides/slide25.xml><?xml version="1.0" encoding="utf-8"?>
-<p:sld xmlns:a="http://schemas.openxmlformats.org/drawingml/2006/main" xmlns:p="http://schemas.openxmlformats.org/presentationml/2006/main" xmlns:r="http://schemas.openxmlformats.org/officeDocument/2006/relationships">
+<p:sld xmlns:a="http://schemas.openxmlformats.org/drawingml/2006/main" xmlns:r="http://schemas.openxmlformats.org/officeDocument/2006/relationships" xmlns:p="http://schemas.openxmlformats.org/presentationml/2006/main">
   <p:cSld>
     <p:spTree>
       <p:nvGrpSpPr>
@@ -10252,7 +10395,14 @@
         <p:cNvGrpSpPr/>
         <p:nvPr/>
       </p:nvGrpSpPr>
-      <p:grpSpPr/>
+      <p:grpSpPr>
+        <a:xfrm>
+          <a:off x="0" y="0"/>
+          <a:ext cx="0" cy="0"/>
+          <a:chOff x="0" y="0"/>
+          <a:chExt cx="0" cy="0"/>
+        </a:xfrm>
+      </p:grpSpPr>
       <p:sp>
         <p:nvSpPr>
           <p:cNvPr id="2" name="Rectangle 1"/>
@@ -10294,6 +10444,7 @@
           <a:lstStyle/>
           <a:p>
             <a:pPr algn="ctr"/>
+            <a:endParaRPr/>
           </a:p>
         </p:txBody>
       </p:sp>
@@ -10487,7 +10638,7 @@
 </file>
 
 <file path=ppt/slides/slide26.xml><?xml version="1.0" encoding="utf-8"?>
-<p:sld xmlns:a="http://schemas.openxmlformats.org/drawingml/2006/main" xmlns:p="http://schemas.openxmlformats.org/presentationml/2006/main" xmlns:r="http://schemas.openxmlformats.org/officeDocument/2006/relationships">
+<p:sld xmlns:a="http://schemas.openxmlformats.org/drawingml/2006/main" xmlns:r="http://schemas.openxmlformats.org/officeDocument/2006/relationships" xmlns:p="http://schemas.openxmlformats.org/presentationml/2006/main">
   <p:cSld>
     <p:spTree>
       <p:nvGrpSpPr>
@@ -10495,7 +10646,14 @@
         <p:cNvGrpSpPr/>
         <p:nvPr/>
       </p:nvGrpSpPr>
-      <p:grpSpPr/>
+      <p:grpSpPr>
+        <a:xfrm>
+          <a:off x="0" y="0"/>
+          <a:ext cx="0" cy="0"/>
+          <a:chOff x="0" y="0"/>
+          <a:chExt cx="0" cy="0"/>
+        </a:xfrm>
+      </p:grpSpPr>
       <p:sp>
         <p:nvSpPr>
           <p:cNvPr id="2" name="Rectangle 1"/>
@@ -10537,6 +10695,7 @@
           <a:lstStyle/>
           <a:p>
             <a:pPr algn="ctr"/>
+            <a:endParaRPr/>
           </a:p>
         </p:txBody>
       </p:sp>
@@ -10659,6 +10818,7 @@
           <a:lstStyle/>
           <a:p>
             <a:pPr algn="ctr"/>
+            <a:endParaRPr/>
           </a:p>
         </p:txBody>
       </p:sp>
@@ -10726,7 +10886,7 @@
 </file>
 
 <file path=ppt/slides/slide27.xml><?xml version="1.0" encoding="utf-8"?>
-<p:sld xmlns:a="http://schemas.openxmlformats.org/drawingml/2006/main" xmlns:p="http://schemas.openxmlformats.org/presentationml/2006/main" xmlns:r="http://schemas.openxmlformats.org/officeDocument/2006/relationships">
+<p:sld xmlns:a="http://schemas.openxmlformats.org/drawingml/2006/main" xmlns:r="http://schemas.openxmlformats.org/officeDocument/2006/relationships" xmlns:p="http://schemas.openxmlformats.org/presentationml/2006/main">
   <p:cSld>
     <p:spTree>
       <p:nvGrpSpPr>
@@ -10734,7 +10894,14 @@
         <p:cNvGrpSpPr/>
         <p:nvPr/>
       </p:nvGrpSpPr>
-      <p:grpSpPr/>
+      <p:grpSpPr>
+        <a:xfrm>
+          <a:off x="0" y="0"/>
+          <a:ext cx="0" cy="0"/>
+          <a:chOff x="0" y="0"/>
+          <a:chExt cx="0" cy="0"/>
+        </a:xfrm>
+      </p:grpSpPr>
       <p:sp>
         <p:nvSpPr>
           <p:cNvPr id="2" name="Rectangle 1"/>
@@ -10776,6 +10943,7 @@
           <a:lstStyle/>
           <a:p>
             <a:pPr algn="ctr"/>
+            <a:endParaRPr/>
           </a:p>
         </p:txBody>
       </p:sp>
@@ -10969,7 +11137,7 @@
 </file>
 
 <file path=ppt/slides/slide28.xml><?xml version="1.0" encoding="utf-8"?>
-<p:sld xmlns:a="http://schemas.openxmlformats.org/drawingml/2006/main" xmlns:p="http://schemas.openxmlformats.org/presentationml/2006/main" xmlns:r="http://schemas.openxmlformats.org/officeDocument/2006/relationships">
+<p:sld xmlns:a="http://schemas.openxmlformats.org/drawingml/2006/main" xmlns:r="http://schemas.openxmlformats.org/officeDocument/2006/relationships" xmlns:p="http://schemas.openxmlformats.org/presentationml/2006/main">
   <p:cSld>
     <p:spTree>
       <p:nvGrpSpPr>
@@ -10977,7 +11145,14 @@
         <p:cNvGrpSpPr/>
         <p:nvPr/>
       </p:nvGrpSpPr>
-      <p:grpSpPr/>
+      <p:grpSpPr>
+        <a:xfrm>
+          <a:off x="0" y="0"/>
+          <a:ext cx="0" cy="0"/>
+          <a:chOff x="0" y="0"/>
+          <a:chExt cx="0" cy="0"/>
+        </a:xfrm>
+      </p:grpSpPr>
       <p:sp>
         <p:nvSpPr>
           <p:cNvPr id="2" name="Rectangle 1"/>
@@ -11019,6 +11194,7 @@
           <a:lstStyle/>
           <a:p>
             <a:pPr algn="ctr"/>
+            <a:endParaRPr/>
           </a:p>
         </p:txBody>
       </p:sp>
@@ -11212,7 +11388,7 @@
 </file>
 
 <file path=ppt/slides/slide29.xml><?xml version="1.0" encoding="utf-8"?>
-<p:sld xmlns:a="http://schemas.openxmlformats.org/drawingml/2006/main" xmlns:p="http://schemas.openxmlformats.org/presentationml/2006/main" xmlns:r="http://schemas.openxmlformats.org/officeDocument/2006/relationships">
+<p:sld xmlns:a="http://schemas.openxmlformats.org/drawingml/2006/main" xmlns:r="http://schemas.openxmlformats.org/officeDocument/2006/relationships" xmlns:p="http://schemas.openxmlformats.org/presentationml/2006/main">
   <p:cSld>
     <p:spTree>
       <p:nvGrpSpPr>
@@ -11220,7 +11396,14 @@
         <p:cNvGrpSpPr/>
         <p:nvPr/>
       </p:nvGrpSpPr>
-      <p:grpSpPr/>
+      <p:grpSpPr>
+        <a:xfrm>
+          <a:off x="0" y="0"/>
+          <a:ext cx="0" cy="0"/>
+          <a:chOff x="0" y="0"/>
+          <a:chExt cx="0" cy="0"/>
+        </a:xfrm>
+      </p:grpSpPr>
       <p:sp>
         <p:nvSpPr>
           <p:cNvPr id="2" name="Rectangle 1"/>
@@ -11262,6 +11445,7 @@
           <a:lstStyle/>
           <a:p>
             <a:pPr algn="ctr"/>
+            <a:endParaRPr/>
           </a:p>
         </p:txBody>
       </p:sp>
@@ -11455,7 +11639,7 @@
 </file>
 
 <file path=ppt/slides/slide3.xml><?xml version="1.0" encoding="utf-8"?>
-<p:sld xmlns:a="http://schemas.openxmlformats.org/drawingml/2006/main" xmlns:p="http://schemas.openxmlformats.org/presentationml/2006/main" xmlns:r="http://schemas.openxmlformats.org/officeDocument/2006/relationships">
+<p:sld xmlns:a="http://schemas.openxmlformats.org/drawingml/2006/main" xmlns:r="http://schemas.openxmlformats.org/officeDocument/2006/relationships" xmlns:p="http://schemas.openxmlformats.org/presentationml/2006/main">
   <p:cSld>
     <p:spTree>
       <p:nvGrpSpPr>
@@ -11463,7 +11647,14 @@
         <p:cNvGrpSpPr/>
         <p:nvPr/>
       </p:nvGrpSpPr>
-      <p:grpSpPr/>
+      <p:grpSpPr>
+        <a:xfrm>
+          <a:off x="0" y="0"/>
+          <a:ext cx="0" cy="0"/>
+          <a:chOff x="0" y="0"/>
+          <a:chExt cx="0" cy="0"/>
+        </a:xfrm>
+      </p:grpSpPr>
       <p:sp>
         <p:nvSpPr>
           <p:cNvPr id="2" name="Rectangle 1"/>
@@ -11505,6 +11696,7 @@
           <a:lstStyle/>
           <a:p>
             <a:pPr algn="ctr"/>
+            <a:endParaRPr/>
           </a:p>
         </p:txBody>
       </p:sp>
@@ -11691,7 +11883,7 @@
 </file>
 
 <file path=ppt/slides/slide30.xml><?xml version="1.0" encoding="utf-8"?>
-<p:sld xmlns:a="http://schemas.openxmlformats.org/drawingml/2006/main" xmlns:p="http://schemas.openxmlformats.org/presentationml/2006/main" xmlns:r="http://schemas.openxmlformats.org/officeDocument/2006/relationships">
+<p:sld xmlns:a="http://schemas.openxmlformats.org/drawingml/2006/main" xmlns:r="http://schemas.openxmlformats.org/officeDocument/2006/relationships" xmlns:p="http://schemas.openxmlformats.org/presentationml/2006/main">
   <p:cSld>
     <p:spTree>
       <p:nvGrpSpPr>
@@ -11699,7 +11891,14 @@
         <p:cNvGrpSpPr/>
         <p:nvPr/>
       </p:nvGrpSpPr>
-      <p:grpSpPr/>
+      <p:grpSpPr>
+        <a:xfrm>
+          <a:off x="0" y="0"/>
+          <a:ext cx="0" cy="0"/>
+          <a:chOff x="0" y="0"/>
+          <a:chExt cx="0" cy="0"/>
+        </a:xfrm>
+      </p:grpSpPr>
       <p:sp>
         <p:nvSpPr>
           <p:cNvPr id="2" name="Rectangle 1"/>
@@ -11741,6 +11940,7 @@
           <a:lstStyle/>
           <a:p>
             <a:pPr algn="ctr"/>
+            <a:endParaRPr/>
           </a:p>
         </p:txBody>
       </p:sp>
@@ -11934,7 +12134,7 @@
 </file>
 
 <file path=ppt/slides/slide31.xml><?xml version="1.0" encoding="utf-8"?>
-<p:sld xmlns:a="http://schemas.openxmlformats.org/drawingml/2006/main" xmlns:p="http://schemas.openxmlformats.org/presentationml/2006/main" xmlns:r="http://schemas.openxmlformats.org/officeDocument/2006/relationships">
+<p:sld xmlns:a="http://schemas.openxmlformats.org/drawingml/2006/main" xmlns:r="http://schemas.openxmlformats.org/officeDocument/2006/relationships" xmlns:p="http://schemas.openxmlformats.org/presentationml/2006/main">
   <p:cSld>
     <p:spTree>
       <p:nvGrpSpPr>
@@ -11942,7 +12142,14 @@
         <p:cNvGrpSpPr/>
         <p:nvPr/>
       </p:nvGrpSpPr>
-      <p:grpSpPr/>
+      <p:grpSpPr>
+        <a:xfrm>
+          <a:off x="0" y="0"/>
+          <a:ext cx="0" cy="0"/>
+          <a:chOff x="0" y="0"/>
+          <a:chExt cx="0" cy="0"/>
+        </a:xfrm>
+      </p:grpSpPr>
       <p:sp>
         <p:nvSpPr>
           <p:cNvPr id="2" name="Rectangle 1"/>
@@ -11984,6 +12191,7 @@
           <a:lstStyle/>
           <a:p>
             <a:pPr algn="ctr"/>
+            <a:endParaRPr/>
           </a:p>
         </p:txBody>
       </p:sp>
@@ -12177,7 +12385,7 @@
 </file>
 
 <file path=ppt/slides/slide32.xml><?xml version="1.0" encoding="utf-8"?>
-<p:sld xmlns:a="http://schemas.openxmlformats.org/drawingml/2006/main" xmlns:p="http://schemas.openxmlformats.org/presentationml/2006/main" xmlns:r="http://schemas.openxmlformats.org/officeDocument/2006/relationships">
+<p:sld xmlns:a="http://schemas.openxmlformats.org/drawingml/2006/main" xmlns:r="http://schemas.openxmlformats.org/officeDocument/2006/relationships" xmlns:p="http://schemas.openxmlformats.org/presentationml/2006/main">
   <p:cSld>
     <p:spTree>
       <p:nvGrpSpPr>
@@ -12185,7 +12393,14 @@
         <p:cNvGrpSpPr/>
         <p:nvPr/>
       </p:nvGrpSpPr>
-      <p:grpSpPr/>
+      <p:grpSpPr>
+        <a:xfrm>
+          <a:off x="0" y="0"/>
+          <a:ext cx="0" cy="0"/>
+          <a:chOff x="0" y="0"/>
+          <a:chExt cx="0" cy="0"/>
+        </a:xfrm>
+      </p:grpSpPr>
       <p:sp>
         <p:nvSpPr>
           <p:cNvPr id="2" name="Rectangle 1"/>
@@ -12227,6 +12442,7 @@
           <a:lstStyle/>
           <a:p>
             <a:pPr algn="ctr"/>
+            <a:endParaRPr/>
           </a:p>
         </p:txBody>
       </p:sp>
@@ -12420,7 +12636,7 @@
 </file>
 
 <file path=ppt/slides/slide33.xml><?xml version="1.0" encoding="utf-8"?>
-<p:sld xmlns:a="http://schemas.openxmlformats.org/drawingml/2006/main" xmlns:p="http://schemas.openxmlformats.org/presentationml/2006/main" xmlns:r="http://schemas.openxmlformats.org/officeDocument/2006/relationships">
+<p:sld xmlns:a="http://schemas.openxmlformats.org/drawingml/2006/main" xmlns:r="http://schemas.openxmlformats.org/officeDocument/2006/relationships" xmlns:p="http://schemas.openxmlformats.org/presentationml/2006/main">
   <p:cSld>
     <p:spTree>
       <p:nvGrpSpPr>
@@ -12428,7 +12644,14 @@
         <p:cNvGrpSpPr/>
         <p:nvPr/>
       </p:nvGrpSpPr>
-      <p:grpSpPr/>
+      <p:grpSpPr>
+        <a:xfrm>
+          <a:off x="0" y="0"/>
+          <a:ext cx="0" cy="0"/>
+          <a:chOff x="0" y="0"/>
+          <a:chExt cx="0" cy="0"/>
+        </a:xfrm>
+      </p:grpSpPr>
       <p:sp>
         <p:nvSpPr>
           <p:cNvPr id="2" name="Rectangle 1"/>
@@ -12470,6 +12693,7 @@
           <a:lstStyle/>
           <a:p>
             <a:pPr algn="ctr"/>
+            <a:endParaRPr/>
           </a:p>
         </p:txBody>
       </p:sp>
@@ -12592,6 +12816,7 @@
           <a:lstStyle/>
           <a:p>
             <a:pPr algn="ctr"/>
+            <a:endParaRPr/>
           </a:p>
         </p:txBody>
       </p:sp>
@@ -12643,7 +12868,7 @@
 </file>
 
 <file path=ppt/slides/slide34.xml><?xml version="1.0" encoding="utf-8"?>
-<p:sld xmlns:a="http://schemas.openxmlformats.org/drawingml/2006/main" xmlns:p="http://schemas.openxmlformats.org/presentationml/2006/main" xmlns:r="http://schemas.openxmlformats.org/officeDocument/2006/relationships">
+<p:sld xmlns:a="http://schemas.openxmlformats.org/drawingml/2006/main" xmlns:r="http://schemas.openxmlformats.org/officeDocument/2006/relationships" xmlns:p="http://schemas.openxmlformats.org/presentationml/2006/main">
   <p:cSld>
     <p:spTree>
       <p:nvGrpSpPr>
@@ -12651,7 +12876,14 @@
         <p:cNvGrpSpPr/>
         <p:nvPr/>
       </p:nvGrpSpPr>
-      <p:grpSpPr/>
+      <p:grpSpPr>
+        <a:xfrm>
+          <a:off x="0" y="0"/>
+          <a:ext cx="0" cy="0"/>
+          <a:chOff x="0" y="0"/>
+          <a:chExt cx="0" cy="0"/>
+        </a:xfrm>
+      </p:grpSpPr>
       <p:sp>
         <p:nvSpPr>
           <p:cNvPr id="2" name="Rectangle 1"/>
@@ -12693,6 +12925,7 @@
           <a:lstStyle/>
           <a:p>
             <a:pPr algn="ctr"/>
+            <a:endParaRPr/>
           </a:p>
         </p:txBody>
       </p:sp>
@@ -12886,7 +13119,7 @@
 </file>
 
 <file path=ppt/slides/slide35.xml><?xml version="1.0" encoding="utf-8"?>
-<p:sld xmlns:a="http://schemas.openxmlformats.org/drawingml/2006/main" xmlns:p="http://schemas.openxmlformats.org/presentationml/2006/main" xmlns:r="http://schemas.openxmlformats.org/officeDocument/2006/relationships">
+<p:sld xmlns:a="http://schemas.openxmlformats.org/drawingml/2006/main" xmlns:r="http://schemas.openxmlformats.org/officeDocument/2006/relationships" xmlns:p="http://schemas.openxmlformats.org/presentationml/2006/main">
   <p:cSld>
     <p:spTree>
       <p:nvGrpSpPr>
@@ -12894,7 +13127,14 @@
         <p:cNvGrpSpPr/>
         <p:nvPr/>
       </p:nvGrpSpPr>
-      <p:grpSpPr/>
+      <p:grpSpPr>
+        <a:xfrm>
+          <a:off x="0" y="0"/>
+          <a:ext cx="0" cy="0"/>
+          <a:chOff x="0" y="0"/>
+          <a:chExt cx="0" cy="0"/>
+        </a:xfrm>
+      </p:grpSpPr>
       <p:sp>
         <p:nvSpPr>
           <p:cNvPr id="2" name="Rectangle 1"/>
@@ -12936,6 +13176,7 @@
           <a:lstStyle/>
           <a:p>
             <a:pPr algn="ctr"/>
+            <a:endParaRPr/>
           </a:p>
         </p:txBody>
       </p:sp>
@@ -13129,7 +13370,7 @@
 </file>
 
 <file path=ppt/slides/slide36.xml><?xml version="1.0" encoding="utf-8"?>
-<p:sld xmlns:a="http://schemas.openxmlformats.org/drawingml/2006/main" xmlns:p="http://schemas.openxmlformats.org/presentationml/2006/main" xmlns:r="http://schemas.openxmlformats.org/officeDocument/2006/relationships">
+<p:sld xmlns:a="http://schemas.openxmlformats.org/drawingml/2006/main" xmlns:r="http://schemas.openxmlformats.org/officeDocument/2006/relationships" xmlns:p="http://schemas.openxmlformats.org/presentationml/2006/main">
   <p:cSld>
     <p:spTree>
       <p:nvGrpSpPr>
@@ -13137,7 +13378,14 @@
         <p:cNvGrpSpPr/>
         <p:nvPr/>
       </p:nvGrpSpPr>
-      <p:grpSpPr/>
+      <p:grpSpPr>
+        <a:xfrm>
+          <a:off x="0" y="0"/>
+          <a:ext cx="0" cy="0"/>
+          <a:chOff x="0" y="0"/>
+          <a:chExt cx="0" cy="0"/>
+        </a:xfrm>
+      </p:grpSpPr>
       <p:sp>
         <p:nvSpPr>
           <p:cNvPr id="2" name="Rectangle 1"/>
@@ -13179,6 +13427,7 @@
           <a:lstStyle/>
           <a:p>
             <a:pPr algn="ctr"/>
+            <a:endParaRPr/>
           </a:p>
         </p:txBody>
       </p:sp>
@@ -13372,7 +13621,7 @@
 </file>
 
 <file path=ppt/slides/slide37.xml><?xml version="1.0" encoding="utf-8"?>
-<p:sld xmlns:a="http://schemas.openxmlformats.org/drawingml/2006/main" xmlns:p="http://schemas.openxmlformats.org/presentationml/2006/main" xmlns:r="http://schemas.openxmlformats.org/officeDocument/2006/relationships">
+<p:sld xmlns:a="http://schemas.openxmlformats.org/drawingml/2006/main" xmlns:r="http://schemas.openxmlformats.org/officeDocument/2006/relationships" xmlns:p="http://schemas.openxmlformats.org/presentationml/2006/main">
   <p:cSld>
     <p:spTree>
       <p:nvGrpSpPr>
@@ -13380,7 +13629,14 @@
         <p:cNvGrpSpPr/>
         <p:nvPr/>
       </p:nvGrpSpPr>
-      <p:grpSpPr/>
+      <p:grpSpPr>
+        <a:xfrm>
+          <a:off x="0" y="0"/>
+          <a:ext cx="0" cy="0"/>
+          <a:chOff x="0" y="0"/>
+          <a:chExt cx="0" cy="0"/>
+        </a:xfrm>
+      </p:grpSpPr>
       <p:sp>
         <p:nvSpPr>
           <p:cNvPr id="2" name="Rectangle 1"/>
@@ -13422,6 +13678,7 @@
           <a:lstStyle/>
           <a:p>
             <a:pPr algn="ctr"/>
+            <a:endParaRPr/>
           </a:p>
         </p:txBody>
       </p:sp>
@@ -13615,7 +13872,7 @@
 </file>
 
 <file path=ppt/slides/slide38.xml><?xml version="1.0" encoding="utf-8"?>
-<p:sld xmlns:a="http://schemas.openxmlformats.org/drawingml/2006/main" xmlns:p="http://schemas.openxmlformats.org/presentationml/2006/main" xmlns:r="http://schemas.openxmlformats.org/officeDocument/2006/relationships">
+<p:sld xmlns:a="http://schemas.openxmlformats.org/drawingml/2006/main" xmlns:r="http://schemas.openxmlformats.org/officeDocument/2006/relationships" xmlns:p="http://schemas.openxmlformats.org/presentationml/2006/main">
   <p:cSld>
     <p:spTree>
       <p:nvGrpSpPr>
@@ -13623,7 +13880,14 @@
         <p:cNvGrpSpPr/>
         <p:nvPr/>
       </p:nvGrpSpPr>
-      <p:grpSpPr/>
+      <p:grpSpPr>
+        <a:xfrm>
+          <a:off x="0" y="0"/>
+          <a:ext cx="0" cy="0"/>
+          <a:chOff x="0" y="0"/>
+          <a:chExt cx="0" cy="0"/>
+        </a:xfrm>
+      </p:grpSpPr>
       <p:sp>
         <p:nvSpPr>
           <p:cNvPr id="2" name="Rectangle 1"/>
@@ -13665,6 +13929,7 @@
           <a:lstStyle/>
           <a:p>
             <a:pPr algn="ctr"/>
+            <a:endParaRPr/>
           </a:p>
         </p:txBody>
       </p:sp>
@@ -13858,7 +14123,7 @@
 </file>
 
 <file path=ppt/slides/slide39.xml><?xml version="1.0" encoding="utf-8"?>
-<p:sld xmlns:a="http://schemas.openxmlformats.org/drawingml/2006/main" xmlns:p="http://schemas.openxmlformats.org/presentationml/2006/main" xmlns:r="http://schemas.openxmlformats.org/officeDocument/2006/relationships">
+<p:sld xmlns:a="http://schemas.openxmlformats.org/drawingml/2006/main" xmlns:r="http://schemas.openxmlformats.org/officeDocument/2006/relationships" xmlns:p="http://schemas.openxmlformats.org/presentationml/2006/main">
   <p:cSld>
     <p:spTree>
       <p:nvGrpSpPr>
@@ -13866,7 +14131,14 @@
         <p:cNvGrpSpPr/>
         <p:nvPr/>
       </p:nvGrpSpPr>
-      <p:grpSpPr/>
+      <p:grpSpPr>
+        <a:xfrm>
+          <a:off x="0" y="0"/>
+          <a:ext cx="0" cy="0"/>
+          <a:chOff x="0" y="0"/>
+          <a:chExt cx="0" cy="0"/>
+        </a:xfrm>
+      </p:grpSpPr>
       <p:sp>
         <p:nvSpPr>
           <p:cNvPr id="2" name="Rectangle 1"/>
@@ -13908,6 +14180,7 @@
           <a:lstStyle/>
           <a:p>
             <a:pPr algn="ctr"/>
+            <a:endParaRPr/>
           </a:p>
         </p:txBody>
       </p:sp>
@@ -14030,6 +14303,7 @@
           <a:lstStyle/>
           <a:p>
             <a:pPr algn="ctr"/>
+            <a:endParaRPr/>
           </a:p>
         </p:txBody>
       </p:sp>
@@ -14081,7 +14355,7 @@
 </file>
 
 <file path=ppt/slides/slide4.xml><?xml version="1.0" encoding="utf-8"?>
-<p:sld xmlns:a="http://schemas.openxmlformats.org/drawingml/2006/main" xmlns:p="http://schemas.openxmlformats.org/presentationml/2006/main" xmlns:r="http://schemas.openxmlformats.org/officeDocument/2006/relationships">
+<p:sld xmlns:a="http://schemas.openxmlformats.org/drawingml/2006/main" xmlns:r="http://schemas.openxmlformats.org/officeDocument/2006/relationships" xmlns:p="http://schemas.openxmlformats.org/presentationml/2006/main">
   <p:cSld>
     <p:spTree>
       <p:nvGrpSpPr>
@@ -14089,7 +14363,14 @@
         <p:cNvGrpSpPr/>
         <p:nvPr/>
       </p:nvGrpSpPr>
-      <p:grpSpPr/>
+      <p:grpSpPr>
+        <a:xfrm>
+          <a:off x="0" y="0"/>
+          <a:ext cx="0" cy="0"/>
+          <a:chOff x="0" y="0"/>
+          <a:chExt cx="0" cy="0"/>
+        </a:xfrm>
+      </p:grpSpPr>
       <p:sp>
         <p:nvSpPr>
           <p:cNvPr id="2" name="Rectangle 1"/>
@@ -14131,6 +14412,7 @@
           <a:lstStyle/>
           <a:p>
             <a:pPr algn="ctr"/>
+            <a:endParaRPr/>
           </a:p>
         </p:txBody>
       </p:sp>
@@ -14324,7 +14606,7 @@
 </file>
 
 <file path=ppt/slides/slide40.xml><?xml version="1.0" encoding="utf-8"?>
-<p:sld xmlns:a="http://schemas.openxmlformats.org/drawingml/2006/main" xmlns:p="http://schemas.openxmlformats.org/presentationml/2006/main" xmlns:r="http://schemas.openxmlformats.org/officeDocument/2006/relationships">
+<p:sld xmlns:a="http://schemas.openxmlformats.org/drawingml/2006/main" xmlns:r="http://schemas.openxmlformats.org/officeDocument/2006/relationships" xmlns:p="http://schemas.openxmlformats.org/presentationml/2006/main">
   <p:cSld>
     <p:spTree>
       <p:nvGrpSpPr>
@@ -14332,7 +14614,14 @@
         <p:cNvGrpSpPr/>
         <p:nvPr/>
       </p:nvGrpSpPr>
-      <p:grpSpPr/>
+      <p:grpSpPr>
+        <a:xfrm>
+          <a:off x="0" y="0"/>
+          <a:ext cx="0" cy="0"/>
+          <a:chOff x="0" y="0"/>
+          <a:chExt cx="0" cy="0"/>
+        </a:xfrm>
+      </p:grpSpPr>
       <p:sp>
         <p:nvSpPr>
           <p:cNvPr id="2" name="Rectangle 1"/>
@@ -14374,6 +14663,7 @@
           <a:lstStyle/>
           <a:p>
             <a:pPr algn="ctr"/>
+            <a:endParaRPr/>
           </a:p>
         </p:txBody>
       </p:sp>
@@ -14567,7 +14857,7 @@
 </file>
 
 <file path=ppt/slides/slide41.xml><?xml version="1.0" encoding="utf-8"?>
-<p:sld xmlns:a="http://schemas.openxmlformats.org/drawingml/2006/main" xmlns:p="http://schemas.openxmlformats.org/presentationml/2006/main" xmlns:r="http://schemas.openxmlformats.org/officeDocument/2006/relationships">
+<p:sld xmlns:a="http://schemas.openxmlformats.org/drawingml/2006/main" xmlns:r="http://schemas.openxmlformats.org/officeDocument/2006/relationships" xmlns:p="http://schemas.openxmlformats.org/presentationml/2006/main">
   <p:cSld>
     <p:spTree>
       <p:nvGrpSpPr>
@@ -14575,7 +14865,14 @@
         <p:cNvGrpSpPr/>
         <p:nvPr/>
       </p:nvGrpSpPr>
-      <p:grpSpPr/>
+      <p:grpSpPr>
+        <a:xfrm>
+          <a:off x="0" y="0"/>
+          <a:ext cx="0" cy="0"/>
+          <a:chOff x="0" y="0"/>
+          <a:chExt cx="0" cy="0"/>
+        </a:xfrm>
+      </p:grpSpPr>
       <p:sp>
         <p:nvSpPr>
           <p:cNvPr id="2" name="Rectangle 1"/>
@@ -14617,6 +14914,7 @@
           <a:lstStyle/>
           <a:p>
             <a:pPr algn="ctr"/>
+            <a:endParaRPr/>
           </a:p>
         </p:txBody>
       </p:sp>
@@ -14810,7 +15108,7 @@
 </file>
 
 <file path=ppt/slides/slide42.xml><?xml version="1.0" encoding="utf-8"?>
-<p:sld xmlns:a="http://schemas.openxmlformats.org/drawingml/2006/main" xmlns:p="http://schemas.openxmlformats.org/presentationml/2006/main" xmlns:r="http://schemas.openxmlformats.org/officeDocument/2006/relationships">
+<p:sld xmlns:a="http://schemas.openxmlformats.org/drawingml/2006/main" xmlns:r="http://schemas.openxmlformats.org/officeDocument/2006/relationships" xmlns:p="http://schemas.openxmlformats.org/presentationml/2006/main">
   <p:cSld>
     <p:spTree>
       <p:nvGrpSpPr>
@@ -14818,7 +15116,14 @@
         <p:cNvGrpSpPr/>
         <p:nvPr/>
       </p:nvGrpSpPr>
-      <p:grpSpPr/>
+      <p:grpSpPr>
+        <a:xfrm>
+          <a:off x="0" y="0"/>
+          <a:ext cx="0" cy="0"/>
+          <a:chOff x="0" y="0"/>
+          <a:chExt cx="0" cy="0"/>
+        </a:xfrm>
+      </p:grpSpPr>
       <p:sp>
         <p:nvSpPr>
           <p:cNvPr id="2" name="Rectangle 1"/>
@@ -14860,6 +15165,7 @@
           <a:lstStyle/>
           <a:p>
             <a:pPr algn="ctr"/>
+            <a:endParaRPr/>
           </a:p>
         </p:txBody>
       </p:sp>
@@ -15053,7 +15359,7 @@
 </file>
 
 <file path=ppt/slides/slide43.xml><?xml version="1.0" encoding="utf-8"?>
-<p:sld xmlns:a="http://schemas.openxmlformats.org/drawingml/2006/main" xmlns:p="http://schemas.openxmlformats.org/presentationml/2006/main" xmlns:r="http://schemas.openxmlformats.org/officeDocument/2006/relationships">
+<p:sld xmlns:a="http://schemas.openxmlformats.org/drawingml/2006/main" xmlns:r="http://schemas.openxmlformats.org/officeDocument/2006/relationships" xmlns:p="http://schemas.openxmlformats.org/presentationml/2006/main">
   <p:cSld>
     <p:spTree>
       <p:nvGrpSpPr>
@@ -15061,7 +15367,14 @@
         <p:cNvGrpSpPr/>
         <p:nvPr/>
       </p:nvGrpSpPr>
-      <p:grpSpPr/>
+      <p:grpSpPr>
+        <a:xfrm>
+          <a:off x="0" y="0"/>
+          <a:ext cx="0" cy="0"/>
+          <a:chOff x="0" y="0"/>
+          <a:chExt cx="0" cy="0"/>
+        </a:xfrm>
+      </p:grpSpPr>
       <p:sp>
         <p:nvSpPr>
           <p:cNvPr id="2" name="Rectangle 1"/>
@@ -15103,6 +15416,7 @@
           <a:lstStyle/>
           <a:p>
             <a:pPr algn="ctr"/>
+            <a:endParaRPr/>
           </a:p>
         </p:txBody>
       </p:sp>
@@ -15296,7 +15610,7 @@
 </file>
 
 <file path=ppt/slides/slide44.xml><?xml version="1.0" encoding="utf-8"?>
-<p:sld xmlns:a="http://schemas.openxmlformats.org/drawingml/2006/main" xmlns:p="http://schemas.openxmlformats.org/presentationml/2006/main" xmlns:r="http://schemas.openxmlformats.org/officeDocument/2006/relationships">
+<p:sld xmlns:a="http://schemas.openxmlformats.org/drawingml/2006/main" xmlns:r="http://schemas.openxmlformats.org/officeDocument/2006/relationships" xmlns:p="http://schemas.openxmlformats.org/presentationml/2006/main">
   <p:cSld>
     <p:spTree>
       <p:nvGrpSpPr>
@@ -15304,7 +15618,14 @@
         <p:cNvGrpSpPr/>
         <p:nvPr/>
       </p:nvGrpSpPr>
-      <p:grpSpPr/>
+      <p:grpSpPr>
+        <a:xfrm>
+          <a:off x="0" y="0"/>
+          <a:ext cx="0" cy="0"/>
+          <a:chOff x="0" y="0"/>
+          <a:chExt cx="0" cy="0"/>
+        </a:xfrm>
+      </p:grpSpPr>
       <p:sp>
         <p:nvSpPr>
           <p:cNvPr id="2" name="Rectangle 1"/>
@@ -15346,6 +15667,7 @@
           <a:lstStyle/>
           <a:p>
             <a:pPr algn="ctr"/>
+            <a:endParaRPr/>
           </a:p>
         </p:txBody>
       </p:sp>
@@ -15468,6 +15790,7 @@
           <a:lstStyle/>
           <a:p>
             <a:pPr algn="ctr"/>
+            <a:endParaRPr/>
           </a:p>
         </p:txBody>
       </p:sp>
@@ -15492,7 +15815,9 @@
             <a:spAutoFit/>
           </a:bodyPr>
           <a:lstStyle/>
-          <a:p/>
+          <a:p>
+            <a:endParaRPr/>
+          </a:p>
         </p:txBody>
       </p:sp>
     </p:spTree>
@@ -15504,7 +15829,7 @@
 </file>
 
 <file path=ppt/slides/slide45.xml><?xml version="1.0" encoding="utf-8"?>
-<p:sld xmlns:a="http://schemas.openxmlformats.org/drawingml/2006/main" xmlns:p="http://schemas.openxmlformats.org/presentationml/2006/main" xmlns:r="http://schemas.openxmlformats.org/officeDocument/2006/relationships">
+<p:sld xmlns:a="http://schemas.openxmlformats.org/drawingml/2006/main" xmlns:r="http://schemas.openxmlformats.org/officeDocument/2006/relationships" xmlns:p="http://schemas.openxmlformats.org/presentationml/2006/main">
   <p:cSld>
     <p:spTree>
       <p:nvGrpSpPr>
@@ -15512,7 +15837,14 @@
         <p:cNvGrpSpPr/>
         <p:nvPr/>
       </p:nvGrpSpPr>
-      <p:grpSpPr/>
+      <p:grpSpPr>
+        <a:xfrm>
+          <a:off x="0" y="0"/>
+          <a:ext cx="0" cy="0"/>
+          <a:chOff x="0" y="0"/>
+          <a:chExt cx="0" cy="0"/>
+        </a:xfrm>
+      </p:grpSpPr>
       <p:sp>
         <p:nvSpPr>
           <p:cNvPr id="2" name="Rectangle 1"/>
@@ -15554,6 +15886,7 @@
           <a:lstStyle/>
           <a:p>
             <a:pPr algn="ctr"/>
+            <a:endParaRPr/>
           </a:p>
         </p:txBody>
       </p:sp>
@@ -15747,7 +16080,7 @@
 </file>
 
 <file path=ppt/slides/slide46.xml><?xml version="1.0" encoding="utf-8"?>
-<p:sld xmlns:a="http://schemas.openxmlformats.org/drawingml/2006/main" xmlns:p="http://schemas.openxmlformats.org/presentationml/2006/main" xmlns:r="http://schemas.openxmlformats.org/officeDocument/2006/relationships">
+<p:sld xmlns:a="http://schemas.openxmlformats.org/drawingml/2006/main" xmlns:r="http://schemas.openxmlformats.org/officeDocument/2006/relationships" xmlns:p="http://schemas.openxmlformats.org/presentationml/2006/main">
   <p:cSld>
     <p:spTree>
       <p:nvGrpSpPr>
@@ -15755,7 +16088,14 @@
         <p:cNvGrpSpPr/>
         <p:nvPr/>
       </p:nvGrpSpPr>
-      <p:grpSpPr/>
+      <p:grpSpPr>
+        <a:xfrm>
+          <a:off x="0" y="0"/>
+          <a:ext cx="0" cy="0"/>
+          <a:chOff x="0" y="0"/>
+          <a:chExt cx="0" cy="0"/>
+        </a:xfrm>
+      </p:grpSpPr>
       <p:sp>
         <p:nvSpPr>
           <p:cNvPr id="2" name="Rectangle 1"/>
@@ -15797,6 +16137,7 @@
           <a:lstStyle/>
           <a:p>
             <a:pPr algn="ctr"/>
+            <a:endParaRPr/>
           </a:p>
         </p:txBody>
       </p:sp>
@@ -15990,7 +16331,7 @@
 </file>
 
 <file path=ppt/slides/slide47.xml><?xml version="1.0" encoding="utf-8"?>
-<p:sld xmlns:a="http://schemas.openxmlformats.org/drawingml/2006/main" xmlns:p="http://schemas.openxmlformats.org/presentationml/2006/main" xmlns:r="http://schemas.openxmlformats.org/officeDocument/2006/relationships">
+<p:sld xmlns:a="http://schemas.openxmlformats.org/drawingml/2006/main" xmlns:r="http://schemas.openxmlformats.org/officeDocument/2006/relationships" xmlns:p="http://schemas.openxmlformats.org/presentationml/2006/main">
   <p:cSld>
     <p:spTree>
       <p:nvGrpSpPr>
@@ -15998,7 +16339,14 @@
         <p:cNvGrpSpPr/>
         <p:nvPr/>
       </p:nvGrpSpPr>
-      <p:grpSpPr/>
+      <p:grpSpPr>
+        <a:xfrm>
+          <a:off x="0" y="0"/>
+          <a:ext cx="0" cy="0"/>
+          <a:chOff x="0" y="0"/>
+          <a:chExt cx="0" cy="0"/>
+        </a:xfrm>
+      </p:grpSpPr>
       <p:sp>
         <p:nvSpPr>
           <p:cNvPr id="2" name="Rectangle 1"/>
@@ -16040,6 +16388,7 @@
           <a:lstStyle/>
           <a:p>
             <a:pPr algn="ctr"/>
+            <a:endParaRPr/>
           </a:p>
         </p:txBody>
       </p:sp>
@@ -16233,7 +16582,7 @@
 </file>
 
 <file path=ppt/slides/slide5.xml><?xml version="1.0" encoding="utf-8"?>
-<p:sld xmlns:a="http://schemas.openxmlformats.org/drawingml/2006/main" xmlns:p="http://schemas.openxmlformats.org/presentationml/2006/main" xmlns:r="http://schemas.openxmlformats.org/officeDocument/2006/relationships">
+<p:sld xmlns:a="http://schemas.openxmlformats.org/drawingml/2006/main" xmlns:r="http://schemas.openxmlformats.org/officeDocument/2006/relationships" xmlns:p="http://schemas.openxmlformats.org/presentationml/2006/main">
   <p:cSld>
     <p:spTree>
       <p:nvGrpSpPr>
@@ -16241,7 +16590,14 @@
         <p:cNvGrpSpPr/>
         <p:nvPr/>
       </p:nvGrpSpPr>
-      <p:grpSpPr/>
+      <p:grpSpPr>
+        <a:xfrm>
+          <a:off x="0" y="0"/>
+          <a:ext cx="0" cy="0"/>
+          <a:chOff x="0" y="0"/>
+          <a:chExt cx="0" cy="0"/>
+        </a:xfrm>
+      </p:grpSpPr>
       <p:sp>
         <p:nvSpPr>
           <p:cNvPr id="2" name="Rectangle 1"/>
@@ -16283,6 +16639,7 @@
           <a:lstStyle/>
           <a:p>
             <a:pPr algn="ctr"/>
+            <a:endParaRPr/>
           </a:p>
         </p:txBody>
       </p:sp>
@@ -16405,6 +16762,7 @@
           <a:lstStyle/>
           <a:p>
             <a:pPr algn="ctr"/>
+            <a:endParaRPr/>
           </a:p>
         </p:txBody>
       </p:sp>
@@ -16472,7 +16830,7 @@
 </file>
 
 <file path=ppt/slides/slide6.xml><?xml version="1.0" encoding="utf-8"?>
-<p:sld xmlns:a="http://schemas.openxmlformats.org/drawingml/2006/main" xmlns:p="http://schemas.openxmlformats.org/presentationml/2006/main" xmlns:r="http://schemas.openxmlformats.org/officeDocument/2006/relationships">
+<p:sld xmlns:a="http://schemas.openxmlformats.org/drawingml/2006/main" xmlns:r="http://schemas.openxmlformats.org/officeDocument/2006/relationships" xmlns:p="http://schemas.openxmlformats.org/presentationml/2006/main">
   <p:cSld>
     <p:spTree>
       <p:nvGrpSpPr>
@@ -16480,7 +16838,14 @@
         <p:cNvGrpSpPr/>
         <p:nvPr/>
       </p:nvGrpSpPr>
-      <p:grpSpPr/>
+      <p:grpSpPr>
+        <a:xfrm>
+          <a:off x="0" y="0"/>
+          <a:ext cx="0" cy="0"/>
+          <a:chOff x="0" y="0"/>
+          <a:chExt cx="0" cy="0"/>
+        </a:xfrm>
+      </p:grpSpPr>
       <p:sp>
         <p:nvSpPr>
           <p:cNvPr id="2" name="Rectangle 1"/>
@@ -16522,6 +16887,7 @@
           <a:lstStyle/>
           <a:p>
             <a:pPr algn="ctr"/>
+            <a:endParaRPr/>
           </a:p>
         </p:txBody>
       </p:sp>
@@ -16715,7 +17081,7 @@
 </file>
 
 <file path=ppt/slides/slide7.xml><?xml version="1.0" encoding="utf-8"?>
-<p:sld xmlns:a="http://schemas.openxmlformats.org/drawingml/2006/main" xmlns:p="http://schemas.openxmlformats.org/presentationml/2006/main" xmlns:r="http://schemas.openxmlformats.org/officeDocument/2006/relationships">
+<p:sld xmlns:a="http://schemas.openxmlformats.org/drawingml/2006/main" xmlns:r="http://schemas.openxmlformats.org/officeDocument/2006/relationships" xmlns:p="http://schemas.openxmlformats.org/presentationml/2006/main">
   <p:cSld>
     <p:spTree>
       <p:nvGrpSpPr>
@@ -16723,7 +17089,14 @@
         <p:cNvGrpSpPr/>
         <p:nvPr/>
       </p:nvGrpSpPr>
-      <p:grpSpPr/>
+      <p:grpSpPr>
+        <a:xfrm>
+          <a:off x="0" y="0"/>
+          <a:ext cx="0" cy="0"/>
+          <a:chOff x="0" y="0"/>
+          <a:chExt cx="0" cy="0"/>
+        </a:xfrm>
+      </p:grpSpPr>
       <p:sp>
         <p:nvSpPr>
           <p:cNvPr id="2" name="Rectangle 1"/>
@@ -16765,6 +17138,7 @@
           <a:lstStyle/>
           <a:p>
             <a:pPr algn="ctr"/>
+            <a:endParaRPr/>
           </a:p>
         </p:txBody>
       </p:sp>
@@ -16958,7 +17332,7 @@
 </file>
 
 <file path=ppt/slides/slide8.xml><?xml version="1.0" encoding="utf-8"?>
-<p:sld xmlns:a="http://schemas.openxmlformats.org/drawingml/2006/main" xmlns:p="http://schemas.openxmlformats.org/presentationml/2006/main" xmlns:r="http://schemas.openxmlformats.org/officeDocument/2006/relationships">
+<p:sld xmlns:a="http://schemas.openxmlformats.org/drawingml/2006/main" xmlns:r="http://schemas.openxmlformats.org/officeDocument/2006/relationships" xmlns:p="http://schemas.openxmlformats.org/presentationml/2006/main">
   <p:cSld>
     <p:spTree>
       <p:nvGrpSpPr>
@@ -16966,7 +17340,14 @@
         <p:cNvGrpSpPr/>
         <p:nvPr/>
       </p:nvGrpSpPr>
-      <p:grpSpPr/>
+      <p:grpSpPr>
+        <a:xfrm>
+          <a:off x="0" y="0"/>
+          <a:ext cx="0" cy="0"/>
+          <a:chOff x="0" y="0"/>
+          <a:chExt cx="0" cy="0"/>
+        </a:xfrm>
+      </p:grpSpPr>
       <p:sp>
         <p:nvSpPr>
           <p:cNvPr id="2" name="Rectangle 1"/>
@@ -17008,6 +17389,7 @@
           <a:lstStyle/>
           <a:p>
             <a:pPr algn="ctr"/>
+            <a:endParaRPr/>
           </a:p>
         </p:txBody>
       </p:sp>
@@ -17201,7 +17583,7 @@
 </file>
 
 <file path=ppt/slides/slide9.xml><?xml version="1.0" encoding="utf-8"?>
-<p:sld xmlns:a="http://schemas.openxmlformats.org/drawingml/2006/main" xmlns:p="http://schemas.openxmlformats.org/presentationml/2006/main" xmlns:r="http://schemas.openxmlformats.org/officeDocument/2006/relationships">
+<p:sld xmlns:a="http://schemas.openxmlformats.org/drawingml/2006/main" xmlns:r="http://schemas.openxmlformats.org/officeDocument/2006/relationships" xmlns:p="http://schemas.openxmlformats.org/presentationml/2006/main">
   <p:cSld>
     <p:spTree>
       <p:nvGrpSpPr>
@@ -17209,7 +17591,14 @@
         <p:cNvGrpSpPr/>
         <p:nvPr/>
       </p:nvGrpSpPr>
-      <p:grpSpPr/>
+      <p:grpSpPr>
+        <a:xfrm>
+          <a:off x="0" y="0"/>
+          <a:ext cx="0" cy="0"/>
+          <a:chOff x="0" y="0"/>
+          <a:chExt cx="0" cy="0"/>
+        </a:xfrm>
+      </p:grpSpPr>
       <p:sp>
         <p:nvSpPr>
           <p:cNvPr id="2" name="Rectangle 1"/>
@@ -17251,6 +17640,7 @@
           <a:lstStyle/>
           <a:p>
             <a:pPr algn="ctr"/>
+            <a:endParaRPr/>
           </a:p>
         </p:txBody>
       </p:sp>
@@ -17764,7 +18154,7 @@
 </file>
 
 <file path=ppt/theme/theme2.xml><?xml version="1.0" encoding="utf-8"?>
-<a:theme xmlns:a="http://schemas.openxmlformats.org/drawingml/2006/main" name="Office Theme">
+<a:theme xmlns:a="http://schemas.openxmlformats.org/drawingml/2006/main" name="Office 테마">
   <a:themeElements>
     <a:clrScheme name="Office">
       <a:dk1>
@@ -17774,44 +18164,44 @@
         <a:sysClr val="window" lastClr="FFFFFF"/>
       </a:lt1>
       <a:dk2>
-        <a:srgbClr val="1F497D"/>
+        <a:srgbClr val="0E2841"/>
       </a:dk2>
       <a:lt2>
-        <a:srgbClr val="EEECE1"/>
+        <a:srgbClr val="E8E8E8"/>
       </a:lt2>
       <a:accent1>
-        <a:srgbClr val="4F81BD"/>
+        <a:srgbClr val="156082"/>
       </a:accent1>
       <a:accent2>
-        <a:srgbClr val="C0504D"/>
+        <a:srgbClr val="E97132"/>
       </a:accent2>
       <a:accent3>
-        <a:srgbClr val="9BBB59"/>
+        <a:srgbClr val="196B24"/>
       </a:accent3>
       <a:accent4>
-        <a:srgbClr val="8064A2"/>
+        <a:srgbClr val="0F9ED5"/>
       </a:accent4>
       <a:accent5>
-        <a:srgbClr val="4BACC6"/>
+        <a:srgbClr val="A02B93"/>
       </a:accent5>
       <a:accent6>
-        <a:srgbClr val="F79646"/>
+        <a:srgbClr val="4EA72E"/>
       </a:accent6>
       <a:hlink>
-        <a:srgbClr val="0000FF"/>
+        <a:srgbClr val="467886"/>
       </a:hlink>
       <a:folHlink>
-        <a:srgbClr val="800080"/>
+        <a:srgbClr val="96607D"/>
       </a:folHlink>
     </a:clrScheme>
     <a:fontScheme name="Office">
       <a:majorFont>
-        <a:latin typeface="Calibri"/>
+        <a:latin typeface="맑은 고딕" panose="02110004020202020204"/>
         <a:ea typeface=""/>
         <a:cs typeface=""/>
-        <a:font script="Jpan" typeface="ＭＳ Ｐゴシック"/>
+        <a:font script="Jpan" typeface="游ゴシック Light"/>
         <a:font script="Hang" typeface="맑은 고딕"/>
-        <a:font script="Hans" typeface="宋体"/>
+        <a:font script="Hans" typeface="等线 Light"/>
         <a:font script="Hant" typeface="新細明體"/>
         <a:font script="Arab" typeface="Times New Roman"/>
         <a:font script="Hebr" typeface="Times New Roman"/>
@@ -17839,14 +18229,31 @@
         <a:font script="Viet" typeface="Times New Roman"/>
         <a:font script="Uigh" typeface="Microsoft Uighur"/>
         <a:font script="Geor" typeface="Sylfaen"/>
+        <a:font script="Armn" typeface="Arial"/>
+        <a:font script="Bugi" typeface="Leelawadee UI"/>
+        <a:font script="Bopo" typeface="Microsoft JhengHei"/>
+        <a:font script="Java" typeface="Javanese Text"/>
+        <a:font script="Lisu" typeface="Segoe UI"/>
+        <a:font script="Mymr" typeface="Myanmar Text"/>
+        <a:font script="Nkoo" typeface="Ebrima"/>
+        <a:font script="Olck" typeface="Nirmala UI"/>
+        <a:font script="Osma" typeface="Ebrima"/>
+        <a:font script="Phag" typeface="Phagspa"/>
+        <a:font script="Syrn" typeface="Estrangelo Edessa"/>
+        <a:font script="Syrj" typeface="Estrangelo Edessa"/>
+        <a:font script="Syre" typeface="Estrangelo Edessa"/>
+        <a:font script="Sora" typeface="Nirmala UI"/>
+        <a:font script="Tale" typeface="Microsoft Tai Le"/>
+        <a:font script="Talu" typeface="Microsoft New Tai Lue"/>
+        <a:font script="Tfng" typeface="Ebrima"/>
       </a:majorFont>
       <a:minorFont>
-        <a:latin typeface="Calibri"/>
+        <a:latin typeface="맑은 고딕" panose="02110004020202020204"/>
         <a:ea typeface=""/>
         <a:cs typeface=""/>
-        <a:font script="Jpan" typeface="ＭＳ Ｐゴシック"/>
+        <a:font script="Jpan" typeface="游ゴシック"/>
         <a:font script="Hang" typeface="맑은 고딕"/>
-        <a:font script="Hans" typeface="宋体"/>
+        <a:font script="Hans" typeface="等线"/>
         <a:font script="Hant" typeface="新細明體"/>
         <a:font script="Arab" typeface="Arial"/>
         <a:font script="Hebr" typeface="Arial"/>
@@ -17874,6 +18281,23 @@
         <a:font script="Viet" typeface="Arial"/>
         <a:font script="Uigh" typeface="Microsoft Uighur"/>
         <a:font script="Geor" typeface="Sylfaen"/>
+        <a:font script="Armn" typeface="Arial"/>
+        <a:font script="Bugi" typeface="Leelawadee UI"/>
+        <a:font script="Bopo" typeface="Microsoft JhengHei"/>
+        <a:font script="Java" typeface="Javanese Text"/>
+        <a:font script="Lisu" typeface="Segoe UI"/>
+        <a:font script="Mymr" typeface="Myanmar Text"/>
+        <a:font script="Nkoo" typeface="Ebrima"/>
+        <a:font script="Olck" typeface="Nirmala UI"/>
+        <a:font script="Osma" typeface="Ebrima"/>
+        <a:font script="Phag" typeface="Phagspa"/>
+        <a:font script="Syrn" typeface="Estrangelo Edessa"/>
+        <a:font script="Syrj" typeface="Estrangelo Edessa"/>
+        <a:font script="Syre" typeface="Estrangelo Edessa"/>
+        <a:font script="Sora" typeface="Nirmala UI"/>
+        <a:font script="Tale" typeface="Microsoft Tai Le"/>
+        <a:font script="Talu" typeface="Microsoft New Tai Lue"/>
+        <a:font script="Tfng" typeface="Ebrima"/>
       </a:minorFont>
     </a:fontScheme>
     <a:fmtScheme name="Office">
@@ -17885,180 +18309,136 @@
           <a:gsLst>
             <a:gs pos="0">
               <a:schemeClr val="phClr">
-                <a:tint val="50000"/>
-                <a:satMod val="300000"/>
+                <a:lumMod val="110000"/>
+                <a:satMod val="105000"/>
+                <a:tint val="67000"/>
               </a:schemeClr>
             </a:gs>
-            <a:gs pos="35000">
+            <a:gs pos="50000">
               <a:schemeClr val="phClr">
-                <a:tint val="37000"/>
-                <a:satMod val="300000"/>
+                <a:lumMod val="105000"/>
+                <a:satMod val="103000"/>
+                <a:tint val="73000"/>
               </a:schemeClr>
             </a:gs>
             <a:gs pos="100000">
               <a:schemeClr val="phClr">
-                <a:tint val="15000"/>
-                <a:satMod val="350000"/>
+                <a:lumMod val="105000"/>
+                <a:satMod val="109000"/>
+                <a:tint val="81000"/>
               </a:schemeClr>
             </a:gs>
           </a:gsLst>
-          <a:lin ang="16200000" scaled="1"/>
+          <a:lin ang="5400000" scaled="0"/>
         </a:gradFill>
         <a:gradFill rotWithShape="1">
           <a:gsLst>
             <a:gs pos="0">
               <a:schemeClr val="phClr">
-                <a:tint val="100000"/>
+                <a:satMod val="103000"/>
+                <a:lumMod val="102000"/>
+                <a:tint val="94000"/>
+              </a:schemeClr>
+            </a:gs>
+            <a:gs pos="50000">
+              <a:schemeClr val="phClr">
+                <a:satMod val="110000"/>
+                <a:lumMod val="100000"/>
                 <a:shade val="100000"/>
-                <a:satMod val="130000"/>
               </a:schemeClr>
             </a:gs>
             <a:gs pos="100000">
               <a:schemeClr val="phClr">
-                <a:tint val="50000"/>
-                <a:shade val="100000"/>
-                <a:satMod val="350000"/>
+                <a:lumMod val="99000"/>
+                <a:satMod val="120000"/>
+                <a:shade val="78000"/>
               </a:schemeClr>
             </a:gs>
           </a:gsLst>
-          <a:lin ang="16200000" scaled="0"/>
+          <a:lin ang="5400000" scaled="0"/>
         </a:gradFill>
       </a:fillStyleLst>
       <a:lnStyleLst>
-        <a:ln w="9525" cap="flat" cmpd="sng" algn="ctr">
+        <a:ln w="12700" cap="flat" cmpd="sng" algn="ctr">
           <a:solidFill>
-            <a:schemeClr val="phClr">
-              <a:shade val="95000"/>
-              <a:satMod val="105000"/>
-            </a:schemeClr>
+            <a:schemeClr val="phClr"/>
           </a:solidFill>
           <a:prstDash val="solid"/>
+          <a:miter lim="800000"/>
+        </a:ln>
+        <a:ln w="19050" cap="flat" cmpd="sng" algn="ctr">
+          <a:solidFill>
+            <a:schemeClr val="phClr"/>
+          </a:solidFill>
+          <a:prstDash val="solid"/>
+          <a:miter lim="800000"/>
         </a:ln>
         <a:ln w="25400" cap="flat" cmpd="sng" algn="ctr">
           <a:solidFill>
             <a:schemeClr val="phClr"/>
           </a:solidFill>
           <a:prstDash val="solid"/>
-        </a:ln>
-        <a:ln w="38100" cap="flat" cmpd="sng" algn="ctr">
-          <a:solidFill>
-            <a:schemeClr val="phClr"/>
-          </a:solidFill>
-          <a:prstDash val="solid"/>
+          <a:miter lim="800000"/>
         </a:ln>
       </a:lnStyleLst>
       <a:effectStyleLst>
         <a:effectStyle>
+          <a:effectLst/>
+        </a:effectStyle>
+        <a:effectStyle>
+          <a:effectLst/>
+        </a:effectStyle>
+        <a:effectStyle>
           <a:effectLst>
-            <a:outerShdw blurRad="40000" dist="20000" dir="5400000" rotWithShape="0">
+            <a:outerShdw blurRad="57150" dist="19050" dir="5400000" algn="ctr" rotWithShape="0">
               <a:srgbClr val="000000">
-                <a:alpha val="38000"/>
+                <a:alpha val="63000"/>
               </a:srgbClr>
             </a:outerShdw>
           </a:effectLst>
-        </a:effectStyle>
-        <a:effectStyle>
-          <a:effectLst>
-            <a:outerShdw blurRad="40000" dist="23000" dir="5400000" rotWithShape="0">
-              <a:srgbClr val="000000">
-                <a:alpha val="35000"/>
-              </a:srgbClr>
-            </a:outerShdw>
-          </a:effectLst>
-        </a:effectStyle>
-        <a:effectStyle>
-          <a:effectLst>
-            <a:outerShdw blurRad="40000" dist="23000" dir="5400000" rotWithShape="0">
-              <a:srgbClr val="000000">
-                <a:alpha val="35000"/>
-              </a:srgbClr>
-            </a:outerShdw>
-          </a:effectLst>
-          <a:scene3d>
-            <a:camera prst="orthographicFront">
-              <a:rot lat="0" lon="0" rev="0"/>
-            </a:camera>
-            <a:lightRig rig="threePt" dir="t">
-              <a:rot lat="0" lon="0" rev="1200000"/>
-            </a:lightRig>
-          </a:scene3d>
-          <a:sp3d>
-            <a:bevelT w="63500" h="25400"/>
-          </a:sp3d>
         </a:effectStyle>
       </a:effectStyleLst>
       <a:bgFillStyleLst>
         <a:solidFill>
           <a:schemeClr val="phClr"/>
         </a:solidFill>
+        <a:solidFill>
+          <a:schemeClr val="phClr">
+            <a:tint val="95000"/>
+            <a:satMod val="170000"/>
+          </a:schemeClr>
+        </a:solidFill>
         <a:gradFill rotWithShape="1">
           <a:gsLst>
             <a:gs pos="0">
               <a:schemeClr val="phClr">
-                <a:tint val="40000"/>
-                <a:satMod val="350000"/>
+                <a:tint val="93000"/>
+                <a:satMod val="150000"/>
+                <a:shade val="98000"/>
+                <a:lumMod val="102000"/>
               </a:schemeClr>
             </a:gs>
-            <a:gs pos="40000">
+            <a:gs pos="50000">
               <a:schemeClr val="phClr">
-                <a:tint val="45000"/>
-                <a:shade val="99000"/>
-                <a:satMod val="350000"/>
+                <a:tint val="98000"/>
+                <a:satMod val="130000"/>
+                <a:shade val="90000"/>
+                <a:lumMod val="103000"/>
               </a:schemeClr>
             </a:gs>
             <a:gs pos="100000">
               <a:schemeClr val="phClr">
-                <a:shade val="20000"/>
-                <a:satMod val="255000"/>
+                <a:shade val="63000"/>
+                <a:satMod val="120000"/>
               </a:schemeClr>
             </a:gs>
           </a:gsLst>
-          <a:path path="circle">
-            <a:fillToRect l="50000" t="-80000" r="50000" b="180000"/>
-          </a:path>
-        </a:gradFill>
-        <a:gradFill rotWithShape="1">
-          <a:gsLst>
-            <a:gs pos="0">
-              <a:schemeClr val="phClr">
-                <a:tint val="80000"/>
-                <a:satMod val="300000"/>
-              </a:schemeClr>
-            </a:gs>
-            <a:gs pos="100000">
-              <a:schemeClr val="phClr">
-                <a:shade val="30000"/>
-                <a:satMod val="200000"/>
-              </a:schemeClr>
-            </a:gs>
-          </a:gsLst>
-          <a:path path="circle">
-            <a:fillToRect l="50000" t="50000" r="50000" b="50000"/>
-          </a:path>
+          <a:lin ang="5400000" scaled="0"/>
         </a:gradFill>
       </a:bgFillStyleLst>
     </a:fmtScheme>
   </a:themeElements>
   <a:objectDefaults>
-    <a:spDef>
-      <a:spPr/>
-      <a:bodyPr/>
-      <a:lstStyle/>
-      <a:style>
-        <a:lnRef idx="1">
-          <a:schemeClr val="accent1"/>
-        </a:lnRef>
-        <a:fillRef idx="3">
-          <a:schemeClr val="accent1"/>
-        </a:fillRef>
-        <a:effectRef idx="2">
-          <a:schemeClr val="accent1"/>
-        </a:effectRef>
-        <a:fontRef idx="minor">
-          <a:schemeClr val="lt1"/>
-        </a:fontRef>
-      </a:style>
-    </a:spDef>
     <a:lnDef>
       <a:spPr/>
       <a:bodyPr/>
@@ -18080,5 +18460,10 @@
     </a:lnDef>
   </a:objectDefaults>
   <a:extraClrSchemeLst/>
+  <a:extLst>
+    <a:ext uri="{05A4C25C-085E-4340-85A3-A5531E510DB2}">
+      <thm15:themeFamily xmlns:thm15="http://schemas.microsoft.com/office/thememl/2012/main" name="Office Theme" id="{2E142A2C-CD16-42D6-873A-C26D2A0506FA}" vid="{1BDDFF52-6CD6-40A5-AB3C-68EB2F1E4D0A}"/>
+    </a:ext>
+  </a:extLst>
 </a:theme>
 </file>